--- a/media/module1/slides.pptx
+++ b/media/module1/slides.pptx
@@ -58,6 +58,18 @@
     <p:sldId id="306" r:id="rId58"/>
     <p:sldId id="307" r:id="rId59"/>
     <p:sldId id="308" r:id="rId60"/>
+    <p:sldId id="309" r:id="rId61"/>
+    <p:sldId id="310" r:id="rId62"/>
+    <p:sldId id="311" r:id="rId63"/>
+    <p:sldId id="312" r:id="rId64"/>
+    <p:sldId id="313" r:id="rId65"/>
+    <p:sldId id="314" r:id="rId66"/>
+    <p:sldId id="315" r:id="rId67"/>
+    <p:sldId id="316" r:id="rId68"/>
+    <p:sldId id="317" r:id="rId69"/>
+    <p:sldId id="318" r:id="rId70"/>
+    <p:sldId id="319" r:id="rId71"/>
+    <p:sldId id="320" r:id="rId72"/>
   </p:sldIdLst>
   <p:sldSz cx="12191695" cy="6858000" type="screen4x3"/>
   <p:notesSz cx="6858000" cy="9144000"/>
@@ -3029,6 +3041,566 @@
 </p:notes>
 </file>
 
+<file path=ppt/notesSlides/notesSlide42.xml><?xml version="1.0" encoding="utf-8"?>
+<p:notes xmlns:a="http://schemas.openxmlformats.org/drawingml/2006/main" xmlns:p="http://schemas.openxmlformats.org/presentationml/2006/main" xmlns:r="http://schemas.openxmlformats.org/officeDocument/2006/relationships">
+  <p:cSld>
+    <p:spTree>
+      <p:nvGrpSpPr>
+        <p:cNvPr id="1" name=""/>
+        <p:cNvGrpSpPr/>
+        <p:nvPr/>
+      </p:nvGrpSpPr>
+      <p:grpSpPr>
+        <a:xfrm>
+          <a:off x="0" y="0"/>
+          <a:ext cx="0" cy="0"/>
+          <a:chOff x="0" y="0"/>
+          <a:chExt cx="0" cy="0"/>
+        </a:xfrm>
+      </p:grpSpPr>
+      <p:sp>
+        <p:nvSpPr>
+          <p:cNvPr id="2" name="Slide Image Placeholder 1"/>
+          <p:cNvSpPr>
+            <a:spLocks noGrp="1"/>
+          </p:cNvSpPr>
+          <p:nvPr>
+            <p:ph type="sldImg" idx="2"/>
+          </p:nvPr>
+        </p:nvSpPr>
+        <p:spPr/>
+      </p:sp>
+      <p:sp>
+        <p:nvSpPr>
+          <p:cNvPr id="3" name="Notes Placeholder 2"/>
+          <p:cNvSpPr>
+            <a:spLocks noGrp="1"/>
+          </p:cNvSpPr>
+          <p:nvPr>
+            <p:ph type="body" idx="3" sz="quarter"/>
+          </p:nvPr>
+        </p:nvSpPr>
+        <p:spPr/>
+        <p:txBody>
+          <a:bodyPr/>
+          <a:lstStyle/>
+          <a:p>
+            <a:r>
+              <a:t>module1/examples/sv_basics/README.md</a:t>
+            </a:r>
+          </a:p>
+        </p:txBody>
+      </p:sp>
+      <p:sp>
+        <p:nvSpPr>
+          <p:cNvPr id="4" name="Slide Number Placeholder 3"/>
+          <p:cNvSpPr>
+            <a:spLocks noGrp="1"/>
+          </p:cNvSpPr>
+          <p:nvPr>
+            <p:ph type="sldNum" idx="5" sz="quarter"/>
+          </p:nvPr>
+        </p:nvSpPr>
+        <p:spPr/>
+      </p:sp>
+    </p:spTree>
+  </p:cSld>
+  <p:clrMapOvr>
+    <a:masterClrMapping/>
+  </p:clrMapOvr>
+</p:notes>
+</file>
+
+<file path=ppt/notesSlides/notesSlide43.xml><?xml version="1.0" encoding="utf-8"?>
+<p:notes xmlns:a="http://schemas.openxmlformats.org/drawingml/2006/main" xmlns:p="http://schemas.openxmlformats.org/presentationml/2006/main" xmlns:r="http://schemas.openxmlformats.org/officeDocument/2006/relationships">
+  <p:cSld>
+    <p:spTree>
+      <p:nvGrpSpPr>
+        <p:cNvPr id="1" name=""/>
+        <p:cNvGrpSpPr/>
+        <p:nvPr/>
+      </p:nvGrpSpPr>
+      <p:grpSpPr>
+        <a:xfrm>
+          <a:off x="0" y="0"/>
+          <a:ext cx="0" cy="0"/>
+          <a:chOff x="0" y="0"/>
+          <a:chExt cx="0" cy="0"/>
+        </a:xfrm>
+      </p:grpSpPr>
+      <p:sp>
+        <p:nvSpPr>
+          <p:cNvPr id="2" name="Slide Image Placeholder 1"/>
+          <p:cNvSpPr>
+            <a:spLocks noGrp="1"/>
+          </p:cNvSpPr>
+          <p:nvPr>
+            <p:ph type="sldImg" idx="2"/>
+          </p:nvPr>
+        </p:nvSpPr>
+        <p:spPr/>
+      </p:sp>
+      <p:sp>
+        <p:nvSpPr>
+          <p:cNvPr id="3" name="Notes Placeholder 2"/>
+          <p:cNvSpPr>
+            <a:spLocks noGrp="1"/>
+          </p:cNvSpPr>
+          <p:nvPr>
+            <p:ph type="body" idx="3" sz="quarter"/>
+          </p:nvPr>
+        </p:nvSpPr>
+        <p:spPr/>
+        <p:txBody>
+          <a:bodyPr/>
+          <a:lstStyle/>
+          <a:p>
+            <a:r>
+              <a:t>Hands-on: module1/examples/sv_basics/</a:t>
+            </a:r>
+          </a:p>
+        </p:txBody>
+      </p:sp>
+      <p:sp>
+        <p:nvSpPr>
+          <p:cNvPr id="4" name="Slide Number Placeholder 3"/>
+          <p:cNvSpPr>
+            <a:spLocks noGrp="1"/>
+          </p:cNvSpPr>
+          <p:nvPr>
+            <p:ph type="sldNum" idx="5" sz="quarter"/>
+          </p:nvPr>
+        </p:nvSpPr>
+        <p:spPr/>
+      </p:sp>
+    </p:spTree>
+  </p:cSld>
+  <p:clrMapOvr>
+    <a:masterClrMapping/>
+  </p:clrMapOvr>
+</p:notes>
+</file>
+
+<file path=ppt/notesSlides/notesSlide44.xml><?xml version="1.0" encoding="utf-8"?>
+<p:notes xmlns:a="http://schemas.openxmlformats.org/drawingml/2006/main" xmlns:p="http://schemas.openxmlformats.org/presentationml/2006/main" xmlns:r="http://schemas.openxmlformats.org/officeDocument/2006/relationships">
+  <p:cSld>
+    <p:spTree>
+      <p:nvGrpSpPr>
+        <p:cNvPr id="1" name=""/>
+        <p:cNvGrpSpPr/>
+        <p:nvPr/>
+      </p:nvGrpSpPr>
+      <p:grpSpPr>
+        <a:xfrm>
+          <a:off x="0" y="0"/>
+          <a:ext cx="0" cy="0"/>
+          <a:chOff x="0" y="0"/>
+          <a:chExt cx="0" cy="0"/>
+        </a:xfrm>
+      </p:grpSpPr>
+      <p:sp>
+        <p:nvSpPr>
+          <p:cNvPr id="2" name="Slide Image Placeholder 1"/>
+          <p:cNvSpPr>
+            <a:spLocks noGrp="1"/>
+          </p:cNvSpPr>
+          <p:nvPr>
+            <p:ph type="sldImg" idx="2"/>
+          </p:nvPr>
+        </p:nvSpPr>
+        <p:spPr/>
+      </p:sp>
+      <p:sp>
+        <p:nvSpPr>
+          <p:cNvPr id="3" name="Notes Placeholder 2"/>
+          <p:cNvSpPr>
+            <a:spLocks noGrp="1"/>
+          </p:cNvSpPr>
+          <p:nvPr>
+            <p:ph type="body" idx="3" sz="quarter"/>
+          </p:nvPr>
+        </p:nvSpPr>
+        <p:spPr/>
+        <p:txBody>
+          <a:bodyPr/>
+          <a:lstStyle/>
+          <a:p>
+            <a:r>
+              <a:t>module1/examples/interfaces/README.md</a:t>
+            </a:r>
+          </a:p>
+        </p:txBody>
+      </p:sp>
+      <p:sp>
+        <p:nvSpPr>
+          <p:cNvPr id="4" name="Slide Number Placeholder 3"/>
+          <p:cNvSpPr>
+            <a:spLocks noGrp="1"/>
+          </p:cNvSpPr>
+          <p:nvPr>
+            <p:ph type="sldNum" idx="5" sz="quarter"/>
+          </p:nvPr>
+        </p:nvSpPr>
+        <p:spPr/>
+      </p:sp>
+    </p:spTree>
+  </p:cSld>
+  <p:clrMapOvr>
+    <a:masterClrMapping/>
+  </p:clrMapOvr>
+</p:notes>
+</file>
+
+<file path=ppt/notesSlides/notesSlide45.xml><?xml version="1.0" encoding="utf-8"?>
+<p:notes xmlns:a="http://schemas.openxmlformats.org/drawingml/2006/main" xmlns:p="http://schemas.openxmlformats.org/presentationml/2006/main" xmlns:r="http://schemas.openxmlformats.org/officeDocument/2006/relationships">
+  <p:cSld>
+    <p:spTree>
+      <p:nvGrpSpPr>
+        <p:cNvPr id="1" name=""/>
+        <p:cNvGrpSpPr/>
+        <p:nvPr/>
+      </p:nvGrpSpPr>
+      <p:grpSpPr>
+        <a:xfrm>
+          <a:off x="0" y="0"/>
+          <a:ext cx="0" cy="0"/>
+          <a:chOff x="0" y="0"/>
+          <a:chExt cx="0" cy="0"/>
+        </a:xfrm>
+      </p:grpSpPr>
+      <p:sp>
+        <p:nvSpPr>
+          <p:cNvPr id="2" name="Slide Image Placeholder 1"/>
+          <p:cNvSpPr>
+            <a:spLocks noGrp="1"/>
+          </p:cNvSpPr>
+          <p:nvPr>
+            <p:ph type="sldImg" idx="2"/>
+          </p:nvPr>
+        </p:nvSpPr>
+        <p:spPr/>
+      </p:sp>
+      <p:sp>
+        <p:nvSpPr>
+          <p:cNvPr id="3" name="Notes Placeholder 2"/>
+          <p:cNvSpPr>
+            <a:spLocks noGrp="1"/>
+          </p:cNvSpPr>
+          <p:nvPr>
+            <p:ph type="body" idx="3" sz="quarter"/>
+          </p:nvPr>
+        </p:nvSpPr>
+        <p:spPr/>
+        <p:txBody>
+          <a:bodyPr/>
+          <a:lstStyle/>
+          <a:p>
+            <a:r>
+              <a:t>Hands-on: module1/examples/interfaces/</a:t>
+            </a:r>
+          </a:p>
+        </p:txBody>
+      </p:sp>
+      <p:sp>
+        <p:nvSpPr>
+          <p:cNvPr id="4" name="Slide Number Placeholder 3"/>
+          <p:cNvSpPr>
+            <a:spLocks noGrp="1"/>
+          </p:cNvSpPr>
+          <p:nvPr>
+            <p:ph type="sldNum" idx="5" sz="quarter"/>
+          </p:nvPr>
+        </p:nvSpPr>
+        <p:spPr/>
+      </p:sp>
+    </p:spTree>
+  </p:cSld>
+  <p:clrMapOvr>
+    <a:masterClrMapping/>
+  </p:clrMapOvr>
+</p:notes>
+</file>
+
+<file path=ppt/notesSlides/notesSlide46.xml><?xml version="1.0" encoding="utf-8"?>
+<p:notes xmlns:a="http://schemas.openxmlformats.org/drawingml/2006/main" xmlns:p="http://schemas.openxmlformats.org/presentationml/2006/main" xmlns:r="http://schemas.openxmlformats.org/officeDocument/2006/relationships">
+  <p:cSld>
+    <p:spTree>
+      <p:nvGrpSpPr>
+        <p:cNvPr id="1" name=""/>
+        <p:cNvGrpSpPr/>
+        <p:nvPr/>
+      </p:nvGrpSpPr>
+      <p:grpSpPr>
+        <a:xfrm>
+          <a:off x="0" y="0"/>
+          <a:ext cx="0" cy="0"/>
+          <a:chOff x="0" y="0"/>
+          <a:chExt cx="0" cy="0"/>
+        </a:xfrm>
+      </p:grpSpPr>
+      <p:sp>
+        <p:nvSpPr>
+          <p:cNvPr id="2" name="Slide Image Placeholder 1"/>
+          <p:cNvSpPr>
+            <a:spLocks noGrp="1"/>
+          </p:cNvSpPr>
+          <p:nvPr>
+            <p:ph type="sldImg" idx="2"/>
+          </p:nvPr>
+        </p:nvSpPr>
+        <p:spPr/>
+      </p:sp>
+      <p:sp>
+        <p:nvSpPr>
+          <p:cNvPr id="3" name="Notes Placeholder 2"/>
+          <p:cNvSpPr>
+            <a:spLocks noGrp="1"/>
+          </p:cNvSpPr>
+          <p:nvPr>
+            <p:ph type="body" idx="3" sz="quarter"/>
+          </p:nvPr>
+        </p:nvSpPr>
+        <p:spPr/>
+        <p:txBody>
+          <a:bodyPr/>
+          <a:lstStyle/>
+          <a:p>
+            <a:r>
+              <a:t>module1/examples/packages/README.md</a:t>
+            </a:r>
+          </a:p>
+        </p:txBody>
+      </p:sp>
+      <p:sp>
+        <p:nvSpPr>
+          <p:cNvPr id="4" name="Slide Number Placeholder 3"/>
+          <p:cNvSpPr>
+            <a:spLocks noGrp="1"/>
+          </p:cNvSpPr>
+          <p:nvPr>
+            <p:ph type="sldNum" idx="5" sz="quarter"/>
+          </p:nvPr>
+        </p:nvSpPr>
+        <p:spPr/>
+      </p:sp>
+    </p:spTree>
+  </p:cSld>
+  <p:clrMapOvr>
+    <a:masterClrMapping/>
+  </p:clrMapOvr>
+</p:notes>
+</file>
+
+<file path=ppt/notesSlides/notesSlide47.xml><?xml version="1.0" encoding="utf-8"?>
+<p:notes xmlns:a="http://schemas.openxmlformats.org/drawingml/2006/main" xmlns:p="http://schemas.openxmlformats.org/presentationml/2006/main" xmlns:r="http://schemas.openxmlformats.org/officeDocument/2006/relationships">
+  <p:cSld>
+    <p:spTree>
+      <p:nvGrpSpPr>
+        <p:cNvPr id="1" name=""/>
+        <p:cNvGrpSpPr/>
+        <p:nvPr/>
+      </p:nvGrpSpPr>
+      <p:grpSpPr>
+        <a:xfrm>
+          <a:off x="0" y="0"/>
+          <a:ext cx="0" cy="0"/>
+          <a:chOff x="0" y="0"/>
+          <a:chExt cx="0" cy="0"/>
+        </a:xfrm>
+      </p:grpSpPr>
+      <p:sp>
+        <p:nvSpPr>
+          <p:cNvPr id="2" name="Slide Image Placeholder 1"/>
+          <p:cNvSpPr>
+            <a:spLocks noGrp="1"/>
+          </p:cNvSpPr>
+          <p:nvPr>
+            <p:ph type="sldImg" idx="2"/>
+          </p:nvPr>
+        </p:nvSpPr>
+        <p:spPr/>
+      </p:sp>
+      <p:sp>
+        <p:nvSpPr>
+          <p:cNvPr id="3" name="Notes Placeholder 2"/>
+          <p:cNvSpPr>
+            <a:spLocks noGrp="1"/>
+          </p:cNvSpPr>
+          <p:nvPr>
+            <p:ph type="body" idx="3" sz="quarter"/>
+          </p:nvPr>
+        </p:nvSpPr>
+        <p:spPr/>
+        <p:txBody>
+          <a:bodyPr/>
+          <a:lstStyle/>
+          <a:p>
+            <a:r>
+              <a:t>Hands-on: module1/examples/packages/</a:t>
+            </a:r>
+          </a:p>
+        </p:txBody>
+      </p:sp>
+      <p:sp>
+        <p:nvSpPr>
+          <p:cNvPr id="4" name="Slide Number Placeholder 3"/>
+          <p:cNvSpPr>
+            <a:spLocks noGrp="1"/>
+          </p:cNvSpPr>
+          <p:nvPr>
+            <p:ph type="sldNum" idx="5" sz="quarter"/>
+          </p:nvPr>
+        </p:nvSpPr>
+        <p:spPr/>
+      </p:sp>
+    </p:spTree>
+  </p:cSld>
+  <p:clrMapOvr>
+    <a:masterClrMapping/>
+  </p:clrMapOvr>
+</p:notes>
+</file>
+
+<file path=ppt/notesSlides/notesSlide48.xml><?xml version="1.0" encoding="utf-8"?>
+<p:notes xmlns:a="http://schemas.openxmlformats.org/drawingml/2006/main" xmlns:p="http://schemas.openxmlformats.org/presentationml/2006/main" xmlns:r="http://schemas.openxmlformats.org/officeDocument/2006/relationships">
+  <p:cSld>
+    <p:spTree>
+      <p:nvGrpSpPr>
+        <p:cNvPr id="1" name=""/>
+        <p:cNvGrpSpPr/>
+        <p:nvPr/>
+      </p:nvGrpSpPr>
+      <p:grpSpPr>
+        <a:xfrm>
+          <a:off x="0" y="0"/>
+          <a:ext cx="0" cy="0"/>
+          <a:chOff x="0" y="0"/>
+          <a:chExt cx="0" cy="0"/>
+        </a:xfrm>
+      </p:grpSpPr>
+      <p:sp>
+        <p:nvSpPr>
+          <p:cNvPr id="2" name="Slide Image Placeholder 1"/>
+          <p:cNvSpPr>
+            <a:spLocks noGrp="1"/>
+          </p:cNvSpPr>
+          <p:nvPr>
+            <p:ph type="sldImg" idx="2"/>
+          </p:nvPr>
+        </p:nvSpPr>
+        <p:spPr/>
+      </p:sp>
+      <p:sp>
+        <p:nvSpPr>
+          <p:cNvPr id="3" name="Notes Placeholder 2"/>
+          <p:cNvSpPr>
+            <a:spLocks noGrp="1"/>
+          </p:cNvSpPr>
+          <p:nvPr>
+            <p:ph type="body" idx="3" sz="quarter"/>
+          </p:nvPr>
+        </p:nvSpPr>
+        <p:spPr/>
+        <p:txBody>
+          <a:bodyPr/>
+          <a:lstStyle/>
+          <a:p>
+            <a:r>
+              <a:t>module1/examples/data_structures/README.md</a:t>
+            </a:r>
+          </a:p>
+        </p:txBody>
+      </p:sp>
+      <p:sp>
+        <p:nvSpPr>
+          <p:cNvPr id="4" name="Slide Number Placeholder 3"/>
+          <p:cNvSpPr>
+            <a:spLocks noGrp="1"/>
+          </p:cNvSpPr>
+          <p:nvPr>
+            <p:ph type="sldNum" idx="5" sz="quarter"/>
+          </p:nvPr>
+        </p:nvSpPr>
+        <p:spPr/>
+      </p:sp>
+    </p:spTree>
+  </p:cSld>
+  <p:clrMapOvr>
+    <a:masterClrMapping/>
+  </p:clrMapOvr>
+</p:notes>
+</file>
+
+<file path=ppt/notesSlides/notesSlide49.xml><?xml version="1.0" encoding="utf-8"?>
+<p:notes xmlns:a="http://schemas.openxmlformats.org/drawingml/2006/main" xmlns:p="http://schemas.openxmlformats.org/presentationml/2006/main" xmlns:r="http://schemas.openxmlformats.org/officeDocument/2006/relationships">
+  <p:cSld>
+    <p:spTree>
+      <p:nvGrpSpPr>
+        <p:cNvPr id="1" name=""/>
+        <p:cNvGrpSpPr/>
+        <p:nvPr/>
+      </p:nvGrpSpPr>
+      <p:grpSpPr>
+        <a:xfrm>
+          <a:off x="0" y="0"/>
+          <a:ext cx="0" cy="0"/>
+          <a:chOff x="0" y="0"/>
+          <a:chExt cx="0" cy="0"/>
+        </a:xfrm>
+      </p:grpSpPr>
+      <p:sp>
+        <p:nvSpPr>
+          <p:cNvPr id="2" name="Slide Image Placeholder 1"/>
+          <p:cNvSpPr>
+            <a:spLocks noGrp="1"/>
+          </p:cNvSpPr>
+          <p:nvPr>
+            <p:ph type="sldImg" idx="2"/>
+          </p:nvPr>
+        </p:nvSpPr>
+        <p:spPr/>
+      </p:sp>
+      <p:sp>
+        <p:nvSpPr>
+          <p:cNvPr id="3" name="Notes Placeholder 2"/>
+          <p:cNvSpPr>
+            <a:spLocks noGrp="1"/>
+          </p:cNvSpPr>
+          <p:nvPr>
+            <p:ph type="body" idx="3" sz="quarter"/>
+          </p:nvPr>
+        </p:nvSpPr>
+        <p:spPr/>
+        <p:txBody>
+          <a:bodyPr/>
+          <a:lstStyle/>
+          <a:p>
+            <a:r>
+              <a:t>Hands-on: module1/examples/data_structures/</a:t>
+            </a:r>
+          </a:p>
+        </p:txBody>
+      </p:sp>
+      <p:sp>
+        <p:nvSpPr>
+          <p:cNvPr id="4" name="Slide Number Placeholder 3"/>
+          <p:cNvSpPr>
+            <a:spLocks noGrp="1"/>
+          </p:cNvSpPr>
+          <p:nvPr>
+            <p:ph type="sldNum" idx="5" sz="quarter"/>
+          </p:nvPr>
+        </p:nvSpPr>
+        <p:spPr/>
+      </p:sp>
+    </p:spTree>
+  </p:cSld>
+  <p:clrMapOvr>
+    <a:masterClrMapping/>
+  </p:clrMapOvr>
+</p:notes>
+</file>
+
 <file path=ppt/notesSlides/notesSlide5.xml><?xml version="1.0" encoding="utf-8"?>
 <p:notes xmlns:a="http://schemas.openxmlformats.org/drawingml/2006/main" xmlns:p="http://schemas.openxmlformats.org/presentationml/2006/main" xmlns:r="http://schemas.openxmlformats.org/officeDocument/2006/relationships">
   <p:cSld>
@@ -3075,6 +3647,286 @@
           <a:p>
             <a:r>
               <a:t>From MODULE1 Topics Covered.</a:t>
+            </a:r>
+          </a:p>
+        </p:txBody>
+      </p:sp>
+      <p:sp>
+        <p:nvSpPr>
+          <p:cNvPr id="4" name="Slide Number Placeholder 3"/>
+          <p:cNvSpPr>
+            <a:spLocks noGrp="1"/>
+          </p:cNvSpPr>
+          <p:nvPr>
+            <p:ph type="sldNum" idx="5" sz="quarter"/>
+          </p:nvPr>
+        </p:nvSpPr>
+        <p:spPr/>
+      </p:sp>
+    </p:spTree>
+  </p:cSld>
+  <p:clrMapOvr>
+    <a:masterClrMapping/>
+  </p:clrMapOvr>
+</p:notes>
+</file>
+
+<file path=ppt/notesSlides/notesSlide50.xml><?xml version="1.0" encoding="utf-8"?>
+<p:notes xmlns:a="http://schemas.openxmlformats.org/drawingml/2006/main" xmlns:p="http://schemas.openxmlformats.org/presentationml/2006/main" xmlns:r="http://schemas.openxmlformats.org/officeDocument/2006/relationships">
+  <p:cSld>
+    <p:spTree>
+      <p:nvGrpSpPr>
+        <p:cNvPr id="1" name=""/>
+        <p:cNvGrpSpPr/>
+        <p:nvPr/>
+      </p:nvGrpSpPr>
+      <p:grpSpPr>
+        <a:xfrm>
+          <a:off x="0" y="0"/>
+          <a:ext cx="0" cy="0"/>
+          <a:chOff x="0" y="0"/>
+          <a:chExt cx="0" cy="0"/>
+        </a:xfrm>
+      </p:grpSpPr>
+      <p:sp>
+        <p:nvSpPr>
+          <p:cNvPr id="2" name="Slide Image Placeholder 1"/>
+          <p:cNvSpPr>
+            <a:spLocks noGrp="1"/>
+          </p:cNvSpPr>
+          <p:nvPr>
+            <p:ph type="sldImg" idx="2"/>
+          </p:nvPr>
+        </p:nvSpPr>
+        <p:spPr/>
+      </p:sp>
+      <p:sp>
+        <p:nvSpPr>
+          <p:cNvPr id="3" name="Notes Placeholder 2"/>
+          <p:cNvSpPr>
+            <a:spLocks noGrp="1"/>
+          </p:cNvSpPr>
+          <p:nvPr>
+            <p:ph type="body" idx="3" sz="quarter"/>
+          </p:nvPr>
+        </p:nvSpPr>
+        <p:spPr/>
+        <p:txBody>
+          <a:bodyPr/>
+          <a:lstStyle/>
+          <a:p>
+            <a:r>
+              <a:t>module1/examples/error_handling/README.md</a:t>
+            </a:r>
+          </a:p>
+        </p:txBody>
+      </p:sp>
+      <p:sp>
+        <p:nvSpPr>
+          <p:cNvPr id="4" name="Slide Number Placeholder 3"/>
+          <p:cNvSpPr>
+            <a:spLocks noGrp="1"/>
+          </p:cNvSpPr>
+          <p:nvPr>
+            <p:ph type="sldNum" idx="5" sz="quarter"/>
+          </p:nvPr>
+        </p:nvSpPr>
+        <p:spPr/>
+      </p:sp>
+    </p:spTree>
+  </p:cSld>
+  <p:clrMapOvr>
+    <a:masterClrMapping/>
+  </p:clrMapOvr>
+</p:notes>
+</file>
+
+<file path=ppt/notesSlides/notesSlide51.xml><?xml version="1.0" encoding="utf-8"?>
+<p:notes xmlns:a="http://schemas.openxmlformats.org/drawingml/2006/main" xmlns:p="http://schemas.openxmlformats.org/presentationml/2006/main" xmlns:r="http://schemas.openxmlformats.org/officeDocument/2006/relationships">
+  <p:cSld>
+    <p:spTree>
+      <p:nvGrpSpPr>
+        <p:cNvPr id="1" name=""/>
+        <p:cNvGrpSpPr/>
+        <p:nvPr/>
+      </p:nvGrpSpPr>
+      <p:grpSpPr>
+        <a:xfrm>
+          <a:off x="0" y="0"/>
+          <a:ext cx="0" cy="0"/>
+          <a:chOff x="0" y="0"/>
+          <a:chExt cx="0" cy="0"/>
+        </a:xfrm>
+      </p:grpSpPr>
+      <p:sp>
+        <p:nvSpPr>
+          <p:cNvPr id="2" name="Slide Image Placeholder 1"/>
+          <p:cNvSpPr>
+            <a:spLocks noGrp="1"/>
+          </p:cNvSpPr>
+          <p:nvPr>
+            <p:ph type="sldImg" idx="2"/>
+          </p:nvPr>
+        </p:nvSpPr>
+        <p:spPr/>
+      </p:sp>
+      <p:sp>
+        <p:nvSpPr>
+          <p:cNvPr id="3" name="Notes Placeholder 2"/>
+          <p:cNvSpPr>
+            <a:spLocks noGrp="1"/>
+          </p:cNvSpPr>
+          <p:nvPr>
+            <p:ph type="body" idx="3" sz="quarter"/>
+          </p:nvPr>
+        </p:nvSpPr>
+        <p:spPr/>
+        <p:txBody>
+          <a:bodyPr/>
+          <a:lstStyle/>
+          <a:p>
+            <a:r>
+              <a:t>Hands-on: module1/examples/error_handling/</a:t>
+            </a:r>
+          </a:p>
+        </p:txBody>
+      </p:sp>
+      <p:sp>
+        <p:nvSpPr>
+          <p:cNvPr id="4" name="Slide Number Placeholder 3"/>
+          <p:cNvSpPr>
+            <a:spLocks noGrp="1"/>
+          </p:cNvSpPr>
+          <p:nvPr>
+            <p:ph type="sldNum" idx="5" sz="quarter"/>
+          </p:nvPr>
+        </p:nvSpPr>
+        <p:spPr/>
+      </p:sp>
+    </p:spTree>
+  </p:cSld>
+  <p:clrMapOvr>
+    <a:masterClrMapping/>
+  </p:clrMapOvr>
+</p:notes>
+</file>
+
+<file path=ppt/notesSlides/notesSlide52.xml><?xml version="1.0" encoding="utf-8"?>
+<p:notes xmlns:a="http://schemas.openxmlformats.org/drawingml/2006/main" xmlns:p="http://schemas.openxmlformats.org/presentationml/2006/main" xmlns:r="http://schemas.openxmlformats.org/officeDocument/2006/relationships">
+  <p:cSld>
+    <p:spTree>
+      <p:nvGrpSpPr>
+        <p:cNvPr id="1" name=""/>
+        <p:cNvGrpSpPr/>
+        <p:nvPr/>
+      </p:nvGrpSpPr>
+      <p:grpSpPr>
+        <a:xfrm>
+          <a:off x="0" y="0"/>
+          <a:ext cx="0" cy="0"/>
+          <a:chOff x="0" y="0"/>
+          <a:chExt cx="0" cy="0"/>
+        </a:xfrm>
+      </p:grpSpPr>
+      <p:sp>
+        <p:nvSpPr>
+          <p:cNvPr id="2" name="Slide Image Placeholder 1"/>
+          <p:cNvSpPr>
+            <a:spLocks noGrp="1"/>
+          </p:cNvSpPr>
+          <p:nvPr>
+            <p:ph type="sldImg" idx="2"/>
+          </p:nvPr>
+        </p:nvSpPr>
+        <p:spPr/>
+      </p:sp>
+      <p:sp>
+        <p:nvSpPr>
+          <p:cNvPr id="3" name="Notes Placeholder 2"/>
+          <p:cNvSpPr>
+            <a:spLocks noGrp="1"/>
+          </p:cNvSpPr>
+          <p:nvPr>
+            <p:ph type="body" idx="3" sz="quarter"/>
+          </p:nvPr>
+        </p:nvSpPr>
+        <p:spPr/>
+        <p:txBody>
+          <a:bodyPr/>
+          <a:lstStyle/>
+          <a:p>
+            <a:r>
+              <a:t>From MODULE1 Learning Outcomes.</a:t>
+            </a:r>
+          </a:p>
+        </p:txBody>
+      </p:sp>
+      <p:sp>
+        <p:nvSpPr>
+          <p:cNvPr id="4" name="Slide Number Placeholder 3"/>
+          <p:cNvSpPr>
+            <a:spLocks noGrp="1"/>
+          </p:cNvSpPr>
+          <p:nvPr>
+            <p:ph type="sldNum" idx="5" sz="quarter"/>
+          </p:nvPr>
+        </p:nvSpPr>
+        <p:spPr/>
+      </p:sp>
+    </p:spTree>
+  </p:cSld>
+  <p:clrMapOvr>
+    <a:masterClrMapping/>
+  </p:clrMapOvr>
+</p:notes>
+</file>
+
+<file path=ppt/notesSlides/notesSlide53.xml><?xml version="1.0" encoding="utf-8"?>
+<p:notes xmlns:a="http://schemas.openxmlformats.org/drawingml/2006/main" xmlns:p="http://schemas.openxmlformats.org/presentationml/2006/main" xmlns:r="http://schemas.openxmlformats.org/officeDocument/2006/relationships">
+  <p:cSld>
+    <p:spTree>
+      <p:nvGrpSpPr>
+        <p:cNvPr id="1" name=""/>
+        <p:cNvGrpSpPr/>
+        <p:nvPr/>
+      </p:nvGrpSpPr>
+      <p:grpSpPr>
+        <a:xfrm>
+          <a:off x="0" y="0"/>
+          <a:ext cx="0" cy="0"/>
+          <a:chOff x="0" y="0"/>
+          <a:chExt cx="0" cy="0"/>
+        </a:xfrm>
+      </p:grpSpPr>
+      <p:sp>
+        <p:nvSpPr>
+          <p:cNvPr id="2" name="Slide Image Placeholder 1"/>
+          <p:cNvSpPr>
+            <a:spLocks noGrp="1"/>
+          </p:cNvSpPr>
+          <p:nvPr>
+            <p:ph type="sldImg" idx="2"/>
+          </p:nvPr>
+        </p:nvSpPr>
+        <p:spPr/>
+      </p:sp>
+      <p:sp>
+        <p:nvSpPr>
+          <p:cNvPr id="3" name="Notes Placeholder 2"/>
+          <p:cNvSpPr>
+            <a:spLocks noGrp="1"/>
+          </p:cNvSpPr>
+          <p:nvPr>
+            <p:ph type="body" idx="3" sz="quarter"/>
+          </p:nvPr>
+        </p:nvSpPr>
+        <p:spPr/>
+        <p:txBody>
+          <a:bodyPr/>
+          <a:lstStyle/>
+          <a:p>
+            <a:r>
+              <a:t>From MODULE1 Learning Outcomes.</a:t>
             </a:r>
           </a:p>
         </p:txBody>
@@ -16506,7 +17358,7 @@
               </a:defRPr>
             </a:pPr>
             <a:r>
-              <a:t>$ ./scripts/module1.sh --check</a:t>
+              <a:t>$ ./scripts/module1.sh --sv-basics</a:t>
             </a:r>
           </a:p>
         </p:txBody>
@@ -16916,8 +17768,8 @@
         </p:nvSpPr>
         <p:spPr>
           <a:xfrm>
-            <a:off x="548640" y="2743200"/>
-            <a:ext cx="11064240" cy="1371600"/>
+            <a:off x="548640" y="411480"/>
+            <a:ext cx="11064240" cy="777240"/>
           </a:xfrm>
           <a:prstGeom prst="rect">
             <a:avLst/>
@@ -16930,11 +17782,11 @@
           </a:bodyPr>
           <a:lstStyle/>
           <a:p>
-            <a:pPr algn="ctr">
-              <a:lnSpc>
-                <a:spcPts val="2200"/>
-              </a:lnSpc>
-              <a:defRPr sz="3600" b="1">
+            <a:pPr>
+              <a:lnSpc>
+                <a:spcPts val="2200"/>
+              </a:lnSpc>
+              <a:defRPr sz="2800" b="1">
                 <a:solidFill>
                   <a:srgbClr val="1A1A2E"/>
                 </a:solidFill>
@@ -16942,7 +17794,7 @@
               </a:defRPr>
             </a:pPr>
             <a:r>
-              <a:t>Practice &amp; assessment</a:t>
+              <a:t>Example 1: Transaction Classes</a:t>
             </a:r>
           </a:p>
         </p:txBody>
@@ -16950,6 +17802,124 @@
       <p:sp>
         <p:nvSpPr>
           <p:cNvPr id="3" name="TextBox 2"/>
+          <p:cNvSpPr txBox="1"/>
+          <p:nvPr/>
+        </p:nvSpPr>
+        <p:spPr>
+          <a:xfrm>
+            <a:off x="548640" y="1234440"/>
+            <a:ext cx="11064240" cy="4937760"/>
+          </a:xfrm>
+          <a:prstGeom prst="rect">
+            <a:avLst/>
+          </a:prstGeom>
+          <a:noFill/>
+        </p:spPr>
+        <p:txBody>
+          <a:bodyPr wrap="square">
+            <a:noAutofit/>
+          </a:bodyPr>
+          <a:lstStyle/>
+          <a:p>
+            <a:pPr>
+              <a:lnSpc>
+                <a:spcPts val="2200"/>
+              </a:lnSpc>
+              <a:spcAft>
+                <a:spcPts val="1000"/>
+              </a:spcAft>
+              <a:defRPr sz="2000" b="0">
+                <a:solidFill>
+                  <a:srgbClr val="333333"/>
+                </a:solidFill>
+                <a:latin typeface="Calibri"/>
+              </a:defRPr>
+            </a:pPr>
+            <a:r>
+              <a:t>• Base `Transaction` class with static variables</a:t>
+            </a:r>
+          </a:p>
+          <a:p>
+            <a:pPr>
+              <a:lnSpc>
+                <a:spcPts val="2200"/>
+              </a:lnSpc>
+              <a:spcAft>
+                <a:spcPts val="1000"/>
+              </a:spcAft>
+              <a:defRPr sz="2000" b="0">
+                <a:solidFill>
+                  <a:srgbClr val="333333"/>
+                </a:solidFill>
+                <a:latin typeface="Calibri"/>
+              </a:defRPr>
+            </a:pPr>
+            <a:r>
+              <a:t>      (`id_counter`)</a:t>
+            </a:r>
+          </a:p>
+          <a:p>
+            <a:pPr>
+              <a:lnSpc>
+                <a:spcPts val="2200"/>
+              </a:lnSpc>
+              <a:spcAft>
+                <a:spcPts val="1000"/>
+              </a:spcAft>
+              <a:defRPr sz="2000" b="0">
+                <a:solidFill>
+                  <a:srgbClr val="333333"/>
+                </a:solidFill>
+                <a:latin typeface="Calibri"/>
+              </a:defRPr>
+            </a:pPr>
+            <a:r>
+              <a:t>• Instance variables (`id`, `data`, `timestamp`)</a:t>
+            </a:r>
+          </a:p>
+          <a:p>
+            <a:pPr>
+              <a:lnSpc>
+                <a:spcPts val="2200"/>
+              </a:lnSpc>
+              <a:spcAft>
+                <a:spcPts val="1000"/>
+              </a:spcAft>
+              <a:defRPr sz="2000" b="0">
+                <a:solidFill>
+                  <a:srgbClr val="333333"/>
+                </a:solidFill>
+                <a:latin typeface="Calibri"/>
+              </a:defRPr>
+            </a:pPr>
+            <a:r>
+              <a:t>• Special methods: `new()`, `copy()`, `compare()`,</a:t>
+            </a:r>
+          </a:p>
+          <a:p>
+            <a:pPr>
+              <a:lnSpc>
+                <a:spcPts val="2200"/>
+              </a:lnSpc>
+              <a:spcAft>
+                <a:spcPts val="1000"/>
+              </a:spcAft>
+              <a:defRPr sz="2000" b="0">
+                <a:solidFill>
+                  <a:srgbClr val="333333"/>
+                </a:solidFill>
+                <a:latin typeface="Calibri"/>
+              </a:defRPr>
+            </a:pPr>
+            <a:r>
+              <a:t>      `convert2string()`</a:t>
+            </a:r>
+          </a:p>
+        </p:txBody>
+      </p:sp>
+      <p:sp>
+        <p:nvSpPr>
+          <p:cNvPr id="4" name="TextBox 3"/>
           <p:cNvSpPr txBox="1"/>
           <p:nvPr/>
         </p:nvSpPr>
@@ -17038,7 +18008,7 @@
               </a:defRPr>
             </a:pPr>
             <a:r>
-              <a:t>Exercises</a:t>
+              <a:t>Demo: Transaction Classes</a:t>
             </a:r>
           </a:p>
         </p:txBody>
@@ -17051,13 +18021,15 @@
         </p:nvSpPr>
         <p:spPr>
           <a:xfrm>
-            <a:off x="548640" y="1234440"/>
-            <a:ext cx="11064240" cy="4937760"/>
+            <a:off x="548640" y="1051560"/>
+            <a:ext cx="11064240" cy="914400"/>
           </a:xfrm>
           <a:prstGeom prst="rect">
             <a:avLst/>
           </a:prstGeom>
-          <a:noFill/>
+          <a:solidFill>
+            <a:srgbClr val="F4F4F4"/>
+          </a:solidFill>
         </p:spPr>
         <p:txBody>
           <a:bodyPr wrap="square">
@@ -17070,100 +18042,48 @@
                 <a:spcPts val="2200"/>
               </a:lnSpc>
               <a:spcAft>
-                <a:spcPts val="1000"/>
-              </a:spcAft>
-              <a:defRPr sz="2000" b="0">
-                <a:solidFill>
-                  <a:srgbClr val="333333"/>
-                </a:solidFill>
-                <a:latin typeface="Calibri"/>
-              </a:defRPr>
-            </a:pPr>
-            <a:r>
-              <a:t>• Transaction Class Design</a:t>
-            </a:r>
-          </a:p>
-          <a:p>
-            <a:pPr>
-              <a:lnSpc>
-                <a:spcPts val="2200"/>
-              </a:lnSpc>
-              <a:spcAft>
-                <a:spcPts val="1000"/>
-              </a:spcAft>
-              <a:defRPr sz="2000" b="0">
-                <a:solidFill>
-                  <a:srgbClr val="333333"/>
-                </a:solidFill>
-                <a:latin typeface="Calibri"/>
-              </a:defRPr>
-            </a:pPr>
-            <a:r>
-              <a:t>• Interface Design</a:t>
-            </a:r>
-          </a:p>
-          <a:p>
-            <a:pPr>
-              <a:lnSpc>
-                <a:spcPts val="2200"/>
-              </a:lnSpc>
-              <a:spcAft>
-                <a:spcPts val="1000"/>
-              </a:spcAft>
-              <a:defRPr sz="2000" b="0">
-                <a:solidFill>
-                  <a:srgbClr val="333333"/>
-                </a:solidFill>
-                <a:latin typeface="Calibri"/>
-              </a:defRPr>
-            </a:pPr>
-            <a:r>
-              <a:t>• Package Organization</a:t>
-            </a:r>
-          </a:p>
-          <a:p>
-            <a:pPr>
-              <a:lnSpc>
-                <a:spcPts val="2200"/>
-              </a:lnSpc>
-              <a:spcAft>
-                <a:spcPts val="1000"/>
-              </a:spcAft>
-              <a:defRPr sz="2000" b="0">
-                <a:solidFill>
-                  <a:srgbClr val="333333"/>
-                </a:solidFill>
-                <a:latin typeface="Calibri"/>
-              </a:defRPr>
-            </a:pPr>
-            <a:r>
-              <a:t>• Data Structure Usage</a:t>
-            </a:r>
-          </a:p>
-          <a:p>
-            <a:pPr>
-              <a:lnSpc>
-                <a:spcPts val="2200"/>
-              </a:lnSpc>
-              <a:spcAft>
-                <a:spcPts val="1000"/>
-              </a:spcAft>
-              <a:defRPr sz="2000" b="0">
-                <a:solidFill>
-                  <a:srgbClr val="333333"/>
-                </a:solidFill>
-                <a:latin typeface="Calibri"/>
-              </a:defRPr>
-            </a:pPr>
-            <a:r>
-              <a:t>• Error Handling</a:t>
-            </a:r>
-          </a:p>
-        </p:txBody>
-      </p:sp>
-      <p:sp>
-        <p:nvSpPr>
-          <p:cNvPr id="4" name="TextBox 3"/>
+                <a:spcPts val="200"/>
+              </a:spcAft>
+              <a:defRPr sz="2000" b="0">
+                <a:solidFill>
+                  <a:srgbClr val="333333"/>
+                </a:solidFill>
+                <a:latin typeface="Consolas"/>
+              </a:defRPr>
+            </a:pPr>
+            <a:r>
+              <a:t>$ ./scripts/module1.sh --sv-basics</a:t>
+            </a:r>
+          </a:p>
+        </p:txBody>
+      </p:sp>
+      <p:pic>
+        <p:nvPicPr>
+          <p:cNvPr id="4" name="Picture 3" descr="ex01_sv_basics.png"/>
+          <p:cNvPicPr>
+            <a:picLocks noChangeAspect="1"/>
+          </p:cNvPicPr>
+          <p:nvPr/>
+        </p:nvPicPr>
+        <p:blipFill>
+          <a:blip r:embed="rId2"/>
+          <a:stretch>
+            <a:fillRect/>
+          </a:stretch>
+        </p:blipFill>
+        <p:spPr>
+          <a:xfrm>
+            <a:off x="548640" y="1965960"/>
+            <a:ext cx="7071358" cy="3977639"/>
+          </a:xfrm>
+          <a:prstGeom prst="rect">
+            <a:avLst/>
+          </a:prstGeom>
+        </p:spPr>
+      </p:pic>
+      <p:sp>
+        <p:nvSpPr>
+          <p:cNvPr id="5" name="TextBox 4"/>
           <p:cNvSpPr txBox="1"/>
           <p:nvPr/>
         </p:nvSpPr>
@@ -17252,7 +18172,7 @@
               </a:defRPr>
             </a:pPr>
             <a:r>
-              <a:t>Assessment checklist</a:t>
+              <a:t>Example 2: Interfaces and Modports</a:t>
             </a:r>
           </a:p>
         </p:txBody>
@@ -17294,102 +18214,102 @@
               </a:defRPr>
             </a:pPr>
             <a:r>
-              <a:t>• Can create SystemVerilog classes with inheritance</a:t>
-            </a:r>
-          </a:p>
-          <a:p>
-            <a:pPr>
-              <a:lnSpc>
-                <a:spcPts val="2200"/>
-              </a:lnSpc>
-              <a:spcAft>
-                <a:spcPts val="1000"/>
-              </a:spcAft>
-              <a:defRPr sz="2000" b="0">
-                <a:solidFill>
-                  <a:srgbClr val="333333"/>
-                </a:solidFill>
-                <a:latin typeface="Calibri"/>
-              </a:defRPr>
-            </a:pPr>
-            <a:r>
-              <a:t>• Can design and use interfaces with modports</a:t>
-            </a:r>
-          </a:p>
-          <a:p>
-            <a:pPr>
-              <a:lnSpc>
-                <a:spcPts val="2200"/>
-              </a:lnSpc>
-              <a:spcAft>
-                <a:spcPts val="1000"/>
-              </a:spcAft>
-              <a:defRPr sz="2000" b="0">
-                <a:solidFill>
-                  <a:srgbClr val="333333"/>
-                </a:solidFill>
-                <a:latin typeface="Calibri"/>
-              </a:defRPr>
-            </a:pPr>
-            <a:r>
-              <a:t>• Can organize code using packages</a:t>
-            </a:r>
-          </a:p>
-          <a:p>
-            <a:pPr>
-              <a:lnSpc>
-                <a:spcPts val="2200"/>
-              </a:lnSpc>
-              <a:spcAft>
-                <a:spcPts val="1000"/>
-              </a:spcAft>
-              <a:defRPr sz="2000" b="0">
-                <a:solidFill>
-                  <a:srgbClr val="333333"/>
-                </a:solidFill>
-                <a:latin typeface="Calibri"/>
-              </a:defRPr>
-            </a:pPr>
-            <a:r>
-              <a:t>• Can use appropriate data structures</a:t>
-            </a:r>
-          </a:p>
-          <a:p>
-            <a:pPr>
-              <a:lnSpc>
-                <a:spcPts val="2200"/>
-              </a:lnSpc>
-              <a:spcAft>
-                <a:spcPts val="1000"/>
-              </a:spcAft>
-              <a:defRPr sz="2000" b="0">
-                <a:solidFill>
-                  <a:srgbClr val="333333"/>
-                </a:solidFill>
-                <a:latin typeface="Calibri"/>
-              </a:defRPr>
-            </a:pPr>
-            <a:r>
-              <a:t>• Can implement error handling and logging</a:t>
-            </a:r>
-          </a:p>
-          <a:p>
-            <a:pPr>
-              <a:lnSpc>
-                <a:spcPts val="2200"/>
-              </a:lnSpc>
-              <a:spcAft>
-                <a:spcPts val="1000"/>
-              </a:spcAft>
-              <a:defRPr sz="2000" b="0">
-                <a:solidFill>
-                  <a:srgbClr val="333333"/>
-                </a:solidFill>
-                <a:latin typeface="Calibri"/>
-              </a:defRPr>
-            </a:pPr>
-            <a:r>
-              <a:t>• Can write basic SystemVerilog testbenches</a:t>
+              <a:t>• Interface Definition: `apb_if` interface with</a:t>
+            </a:r>
+          </a:p>
+          <a:p>
+            <a:pPr>
+              <a:lnSpc>
+                <a:spcPts val="2200"/>
+              </a:lnSpc>
+              <a:spcAft>
+                <a:spcPts val="1000"/>
+              </a:spcAft>
+              <a:defRPr sz="2000" b="0">
+                <a:solidFill>
+                  <a:srgbClr val="333333"/>
+                </a:solidFill>
+                <a:latin typeface="Calibri"/>
+              </a:defRPr>
+            </a:pPr>
+            <a:r>
+              <a:t>      signals and clocking block</a:t>
+            </a:r>
+          </a:p>
+          <a:p>
+            <a:pPr>
+              <a:lnSpc>
+                <a:spcPts val="2200"/>
+              </a:lnSpc>
+              <a:spcAft>
+                <a:spcPts val="1000"/>
+              </a:spcAft>
+              <a:defRPr sz="2000" b="0">
+                <a:solidFill>
+                  <a:srgbClr val="333333"/>
+                </a:solidFill>
+                <a:latin typeface="Calibri"/>
+              </a:defRPr>
+            </a:pPr>
+            <a:r>
+              <a:t>• Modports: `master_mp` and `slave_mp` modports with</a:t>
+            </a:r>
+          </a:p>
+          <a:p>
+            <a:pPr>
+              <a:lnSpc>
+                <a:spcPts val="2200"/>
+              </a:lnSpc>
+              <a:spcAft>
+                <a:spcPts val="1000"/>
+              </a:spcAft>
+              <a:defRPr sz="2000" b="0">
+                <a:solidFill>
+                  <a:srgbClr val="333333"/>
+                </a:solidFill>
+                <a:latin typeface="Calibri"/>
+              </a:defRPr>
+            </a:pPr>
+            <a:r>
+              <a:t>      different signal directions</a:t>
+            </a:r>
+          </a:p>
+          <a:p>
+            <a:pPr>
+              <a:lnSpc>
+                <a:spcPts val="2200"/>
+              </a:lnSpc>
+              <a:spcAft>
+                <a:spcPts val="1000"/>
+              </a:spcAft>
+              <a:defRPr sz="2000" b="0">
+                <a:solidFill>
+                  <a:srgbClr val="333333"/>
+                </a:solidFill>
+                <a:latin typeface="Calibri"/>
+              </a:defRPr>
+            </a:pPr>
+            <a:r>
+              <a:t>• Clocking Block: `cb` clocking block for synchronous</a:t>
+            </a:r>
+          </a:p>
+          <a:p>
+            <a:pPr>
+              <a:lnSpc>
+                <a:spcPts val="2200"/>
+              </a:lnSpc>
+              <a:spcAft>
+                <a:spcPts val="1000"/>
+              </a:spcAft>
+              <a:defRPr sz="2000" b="0">
+                <a:solidFill>
+                  <a:srgbClr val="333333"/>
+                </a:solidFill>
+                <a:latin typeface="Calibri"/>
+              </a:defRPr>
+            </a:pPr>
+            <a:r>
+              <a:t>      access</a:t>
             </a:r>
           </a:p>
         </p:txBody>
@@ -17485,7 +18405,7 @@
               </a:defRPr>
             </a:pPr>
             <a:r>
-              <a:t>Summary &amp; next steps</a:t>
+              <a:t>Demo: Interfaces and Modports</a:t>
             </a:r>
           </a:p>
         </p:txBody>
@@ -17498,8 +18418,76 @@
         </p:nvSpPr>
         <p:spPr>
           <a:xfrm>
-            <a:off x="548640" y="1234440"/>
-            <a:ext cx="11064240" cy="4937760"/>
+            <a:off x="548640" y="1051560"/>
+            <a:ext cx="11064240" cy="914400"/>
+          </a:xfrm>
+          <a:prstGeom prst="rect">
+            <a:avLst/>
+          </a:prstGeom>
+          <a:solidFill>
+            <a:srgbClr val="F4F4F4"/>
+          </a:solidFill>
+        </p:spPr>
+        <p:txBody>
+          <a:bodyPr wrap="square">
+            <a:noAutofit/>
+          </a:bodyPr>
+          <a:lstStyle/>
+          <a:p>
+            <a:pPr>
+              <a:lnSpc>
+                <a:spcPts val="2200"/>
+              </a:lnSpc>
+              <a:spcAft>
+                <a:spcPts val="200"/>
+              </a:spcAft>
+              <a:defRPr sz="2000" b="0">
+                <a:solidFill>
+                  <a:srgbClr val="333333"/>
+                </a:solidFill>
+                <a:latin typeface="Consolas"/>
+              </a:defRPr>
+            </a:pPr>
+            <a:r>
+              <a:t>$ ./scripts/module1.sh --interfaces</a:t>
+            </a:r>
+          </a:p>
+        </p:txBody>
+      </p:sp>
+      <p:pic>
+        <p:nvPicPr>
+          <p:cNvPr id="4" name="Picture 3" descr="ex02_interfaces.png"/>
+          <p:cNvPicPr>
+            <a:picLocks noChangeAspect="1"/>
+          </p:cNvPicPr>
+          <p:nvPr/>
+        </p:nvPicPr>
+        <p:blipFill>
+          <a:blip r:embed="rId2"/>
+          <a:stretch>
+            <a:fillRect/>
+          </a:stretch>
+        </p:blipFill>
+        <p:spPr>
+          <a:xfrm>
+            <a:off x="548640" y="1965960"/>
+            <a:ext cx="7071358" cy="3977639"/>
+          </a:xfrm>
+          <a:prstGeom prst="rect">
+            <a:avLst/>
+          </a:prstGeom>
+        </p:spPr>
+      </p:pic>
+      <p:sp>
+        <p:nvSpPr>
+          <p:cNvPr id="5" name="TextBox 4"/>
+          <p:cNvSpPr txBox="1"/>
+          <p:nvPr/>
+        </p:nvSpPr>
+        <p:spPr>
+          <a:xfrm>
+            <a:off x="548640" y="6355080"/>
+            <a:ext cx="11064240" cy="320040"/>
           </a:xfrm>
           <a:prstGeom prst="rect">
             <a:avLst/>
@@ -17512,98 +18500,175 @@
           </a:bodyPr>
           <a:lstStyle/>
           <a:p>
-            <a:pPr>
-              <a:lnSpc>
-                <a:spcPts val="2200"/>
-              </a:lnSpc>
-              <a:spcAft>
-                <a:spcPts val="1000"/>
-              </a:spcAft>
-              <a:defRPr sz="2000" b="0">
-                <a:solidFill>
-                  <a:srgbClr val="333333"/>
-                </a:solidFill>
-                <a:latin typeface="Calibri"/>
-              </a:defRPr>
-            </a:pPr>
-            <a:r>
-              <a:t>• Understand SystemVerilog for verification and</a:t>
-            </a:r>
-          </a:p>
-          <a:p>
-            <a:pPr>
-              <a:lnSpc>
-                <a:spcPts val="2200"/>
-              </a:lnSpc>
-              <a:spcAft>
-                <a:spcPts val="1000"/>
-              </a:spcAft>
-              <a:defRPr sz="2000" b="0">
-                <a:solidFill>
-                  <a:srgbClr val="333333"/>
-                </a:solidFill>
-                <a:latin typeface="Calibri"/>
-              </a:defRPr>
-            </a:pPr>
-            <a:r>
-              <a:t>      verification fundamentals</a:t>
-            </a:r>
-          </a:p>
-          <a:p>
-            <a:pPr>
-              <a:lnSpc>
-                <a:spcPts val="2200"/>
-              </a:lnSpc>
-              <a:spcAft>
-                <a:spcPts val="1000"/>
-              </a:spcAft>
-              <a:defRPr sz="2000" b="0">
-                <a:solidFill>
-                  <a:srgbClr val="333333"/>
-                </a:solidFill>
-                <a:latin typeface="Calibri"/>
-              </a:defRPr>
-            </a:pPr>
-            <a:r>
-              <a:t>• Complete module1/CHECKLIST.md</a:t>
-            </a:r>
-          </a:p>
-          <a:p>
-            <a:pPr>
-              <a:lnSpc>
-                <a:spcPts val="2200"/>
-              </a:lnSpc>
-              <a:spcAft>
-                <a:spcPts val="1000"/>
-              </a:spcAft>
-              <a:defRPr sz="2000" b="0">
-                <a:solidFill>
-                  <a:srgbClr val="333333"/>
-                </a:solidFill>
-                <a:latin typeface="Calibri"/>
-              </a:defRPr>
-            </a:pPr>
-            <a:r>
-              <a:t>• Run ./scripts/module1.sh --check</a:t>
-            </a:r>
-          </a:p>
-          <a:p>
-            <a:pPr>
-              <a:lnSpc>
-                <a:spcPts val="2200"/>
-              </a:lnSpc>
-              <a:spcAft>
-                <a:spcPts val="1000"/>
-              </a:spcAft>
-              <a:defRPr sz="2000" b="0">
-                <a:solidFill>
-                  <a:srgbClr val="333333"/>
-                </a:solidFill>
-                <a:latin typeface="Calibri"/>
-              </a:defRPr>
-            </a:pPr>
-            <a:r>
-              <a:t>• Next: Next module in course</a:t>
+            <a:pPr algn="r">
+              <a:lnSpc>
+                <a:spcPts val="2200"/>
+              </a:lnSpc>
+              <a:defRPr sz="1000" b="0">
+                <a:solidFill>
+                  <a:srgbClr val="666666"/>
+                </a:solidFill>
+                <a:latin typeface="Calibri"/>
+              </a:defRPr>
+            </a:pPr>
+            <a:r>
+              <a:t>learn_uvm2017_sv_verilator / Module 1</a:t>
+            </a:r>
+          </a:p>
+        </p:txBody>
+      </p:sp>
+    </p:spTree>
+  </p:cSld>
+  <p:clrMapOvr>
+    <a:masterClrMapping/>
+  </p:clrMapOvr>
+</p:sld>
+</file>
+
+<file path=ppt/slides/slide54.xml><?xml version="1.0" encoding="utf-8"?>
+<p:sld xmlns:a="http://schemas.openxmlformats.org/drawingml/2006/main" xmlns:p="http://schemas.openxmlformats.org/presentationml/2006/main" xmlns:r="http://schemas.openxmlformats.org/officeDocument/2006/relationships">
+  <p:cSld>
+    <p:spTree>
+      <p:nvGrpSpPr>
+        <p:cNvPr id="1" name=""/>
+        <p:cNvGrpSpPr/>
+        <p:nvPr/>
+      </p:nvGrpSpPr>
+      <p:grpSpPr/>
+      <p:sp>
+        <p:nvSpPr>
+          <p:cNvPr id="2" name="TextBox 1"/>
+          <p:cNvSpPr txBox="1"/>
+          <p:nvPr/>
+        </p:nvSpPr>
+        <p:spPr>
+          <a:xfrm>
+            <a:off x="548640" y="411480"/>
+            <a:ext cx="11064240" cy="777240"/>
+          </a:xfrm>
+          <a:prstGeom prst="rect">
+            <a:avLst/>
+          </a:prstGeom>
+          <a:noFill/>
+        </p:spPr>
+        <p:txBody>
+          <a:bodyPr wrap="square">
+            <a:noAutofit/>
+          </a:bodyPr>
+          <a:lstStyle/>
+          <a:p>
+            <a:pPr>
+              <a:lnSpc>
+                <a:spcPts val="2200"/>
+              </a:lnSpc>
+              <a:defRPr sz="2800" b="1">
+                <a:solidFill>
+                  <a:srgbClr val="1A1A2E"/>
+                </a:solidFill>
+                <a:latin typeface="Calibri"/>
+              </a:defRPr>
+            </a:pPr>
+            <a:r>
+              <a:t>Example 3: Packages</a:t>
+            </a:r>
+          </a:p>
+        </p:txBody>
+      </p:sp>
+      <p:sp>
+        <p:nvSpPr>
+          <p:cNvPr id="3" name="TextBox 2"/>
+          <p:cNvSpPr txBox="1"/>
+          <p:nvPr/>
+        </p:nvSpPr>
+        <p:spPr>
+          <a:xfrm>
+            <a:off x="548640" y="1234440"/>
+            <a:ext cx="11064240" cy="4937760"/>
+          </a:xfrm>
+          <a:prstGeom prst="rect">
+            <a:avLst/>
+          </a:prstGeom>
+          <a:noFill/>
+        </p:spPr>
+        <p:txBody>
+          <a:bodyPr wrap="square">
+            <a:noAutofit/>
+          </a:bodyPr>
+          <a:lstStyle/>
+          <a:p>
+            <a:pPr>
+              <a:lnSpc>
+                <a:spcPts val="2200"/>
+              </a:lnSpc>
+              <a:spcAft>
+                <a:spcPts val="1000"/>
+              </a:spcAft>
+              <a:defRPr sz="2000" b="0">
+                <a:solidFill>
+                  <a:srgbClr val="333333"/>
+                </a:solidFill>
+                <a:latin typeface="Calibri"/>
+              </a:defRPr>
+            </a:pPr>
+            <a:r>
+              <a:t>• Package Definition: `verification_pkg` with common</a:t>
+            </a:r>
+          </a:p>
+          <a:p>
+            <a:pPr>
+              <a:lnSpc>
+                <a:spcPts val="2200"/>
+              </a:lnSpc>
+              <a:spcAft>
+                <a:spcPts val="1000"/>
+              </a:spcAft>
+              <a:defRPr sz="2000" b="0">
+                <a:solidFill>
+                  <a:srgbClr val="333333"/>
+                </a:solidFill>
+                <a:latin typeface="Calibri"/>
+              </a:defRPr>
+            </a:pPr>
+            <a:r>
+              <a:t>      types and functions</a:t>
+            </a:r>
+          </a:p>
+          <a:p>
+            <a:pPr>
+              <a:lnSpc>
+                <a:spcPts val="2200"/>
+              </a:lnSpc>
+              <a:spcAft>
+                <a:spcPts val="1000"/>
+              </a:spcAft>
+              <a:defRPr sz="2000" b="0">
+                <a:solidFill>
+                  <a:srgbClr val="333333"/>
+                </a:solidFill>
+                <a:latin typeface="Calibri"/>
+              </a:defRPr>
+            </a:pPr>
+            <a:r>
+              <a:t>• Package Import: Using `import verification_pkg::*`</a:t>
+            </a:r>
+          </a:p>
+          <a:p>
+            <a:pPr>
+              <a:lnSpc>
+                <a:spcPts val="2200"/>
+              </a:lnSpc>
+              <a:spcAft>
+                <a:spcPts val="1000"/>
+              </a:spcAft>
+              <a:defRPr sz="2000" b="0">
+                <a:solidFill>
+                  <a:srgbClr val="333333"/>
+                </a:solidFill>
+                <a:latin typeface="Calibri"/>
+              </a:defRPr>
+            </a:pPr>
+            <a:r>
+              <a:t>• Name Resolution: Handling name conflicts</a:t>
             </a:r>
           </a:p>
         </p:txBody>
@@ -17611,6 +18676,907 @@
       <p:sp>
         <p:nvSpPr>
           <p:cNvPr id="4" name="TextBox 3"/>
+          <p:cNvSpPr txBox="1"/>
+          <p:nvPr/>
+        </p:nvSpPr>
+        <p:spPr>
+          <a:xfrm>
+            <a:off x="548640" y="6355080"/>
+            <a:ext cx="11064240" cy="320040"/>
+          </a:xfrm>
+          <a:prstGeom prst="rect">
+            <a:avLst/>
+          </a:prstGeom>
+          <a:noFill/>
+        </p:spPr>
+        <p:txBody>
+          <a:bodyPr wrap="square">
+            <a:noAutofit/>
+          </a:bodyPr>
+          <a:lstStyle/>
+          <a:p>
+            <a:pPr algn="r">
+              <a:lnSpc>
+                <a:spcPts val="2200"/>
+              </a:lnSpc>
+              <a:defRPr sz="1000" b="0">
+                <a:solidFill>
+                  <a:srgbClr val="666666"/>
+                </a:solidFill>
+                <a:latin typeface="Calibri"/>
+              </a:defRPr>
+            </a:pPr>
+            <a:r>
+              <a:t>learn_uvm2017_sv_verilator / Module 1</a:t>
+            </a:r>
+          </a:p>
+        </p:txBody>
+      </p:sp>
+    </p:spTree>
+  </p:cSld>
+  <p:clrMapOvr>
+    <a:masterClrMapping/>
+  </p:clrMapOvr>
+</p:sld>
+</file>
+
+<file path=ppt/slides/slide55.xml><?xml version="1.0" encoding="utf-8"?>
+<p:sld xmlns:a="http://schemas.openxmlformats.org/drawingml/2006/main" xmlns:p="http://schemas.openxmlformats.org/presentationml/2006/main" xmlns:r="http://schemas.openxmlformats.org/officeDocument/2006/relationships">
+  <p:cSld>
+    <p:spTree>
+      <p:nvGrpSpPr>
+        <p:cNvPr id="1" name=""/>
+        <p:cNvGrpSpPr/>
+        <p:nvPr/>
+      </p:nvGrpSpPr>
+      <p:grpSpPr/>
+      <p:sp>
+        <p:nvSpPr>
+          <p:cNvPr id="2" name="TextBox 1"/>
+          <p:cNvSpPr txBox="1"/>
+          <p:nvPr/>
+        </p:nvSpPr>
+        <p:spPr>
+          <a:xfrm>
+            <a:off x="548640" y="411480"/>
+            <a:ext cx="11064240" cy="777240"/>
+          </a:xfrm>
+          <a:prstGeom prst="rect">
+            <a:avLst/>
+          </a:prstGeom>
+          <a:noFill/>
+        </p:spPr>
+        <p:txBody>
+          <a:bodyPr wrap="square">
+            <a:noAutofit/>
+          </a:bodyPr>
+          <a:lstStyle/>
+          <a:p>
+            <a:pPr>
+              <a:lnSpc>
+                <a:spcPts val="2200"/>
+              </a:lnSpc>
+              <a:defRPr sz="2800" b="1">
+                <a:solidFill>
+                  <a:srgbClr val="1A1A2E"/>
+                </a:solidFill>
+                <a:latin typeface="Calibri"/>
+              </a:defRPr>
+            </a:pPr>
+            <a:r>
+              <a:t>Demo: Packages</a:t>
+            </a:r>
+          </a:p>
+        </p:txBody>
+      </p:sp>
+      <p:sp>
+        <p:nvSpPr>
+          <p:cNvPr id="3" name="TextBox 2"/>
+          <p:cNvSpPr txBox="1"/>
+          <p:nvPr/>
+        </p:nvSpPr>
+        <p:spPr>
+          <a:xfrm>
+            <a:off x="548640" y="1051560"/>
+            <a:ext cx="11064240" cy="914400"/>
+          </a:xfrm>
+          <a:prstGeom prst="rect">
+            <a:avLst/>
+          </a:prstGeom>
+          <a:solidFill>
+            <a:srgbClr val="F4F4F4"/>
+          </a:solidFill>
+        </p:spPr>
+        <p:txBody>
+          <a:bodyPr wrap="square">
+            <a:noAutofit/>
+          </a:bodyPr>
+          <a:lstStyle/>
+          <a:p>
+            <a:pPr>
+              <a:lnSpc>
+                <a:spcPts val="2200"/>
+              </a:lnSpc>
+              <a:spcAft>
+                <a:spcPts val="200"/>
+              </a:spcAft>
+              <a:defRPr sz="2000" b="0">
+                <a:solidFill>
+                  <a:srgbClr val="333333"/>
+                </a:solidFill>
+                <a:latin typeface="Consolas"/>
+              </a:defRPr>
+            </a:pPr>
+            <a:r>
+              <a:t>$ ./scripts/module1.sh --packages</a:t>
+            </a:r>
+          </a:p>
+        </p:txBody>
+      </p:sp>
+      <p:pic>
+        <p:nvPicPr>
+          <p:cNvPr id="4" name="Picture 3" descr="ex03_packages.png"/>
+          <p:cNvPicPr>
+            <a:picLocks noChangeAspect="1"/>
+          </p:cNvPicPr>
+          <p:nvPr/>
+        </p:nvPicPr>
+        <p:blipFill>
+          <a:blip r:embed="rId2"/>
+          <a:stretch>
+            <a:fillRect/>
+          </a:stretch>
+        </p:blipFill>
+        <p:spPr>
+          <a:xfrm>
+            <a:off x="548640" y="1965960"/>
+            <a:ext cx="7071358" cy="3977639"/>
+          </a:xfrm>
+          <a:prstGeom prst="rect">
+            <a:avLst/>
+          </a:prstGeom>
+        </p:spPr>
+      </p:pic>
+      <p:sp>
+        <p:nvSpPr>
+          <p:cNvPr id="5" name="TextBox 4"/>
+          <p:cNvSpPr txBox="1"/>
+          <p:nvPr/>
+        </p:nvSpPr>
+        <p:spPr>
+          <a:xfrm>
+            <a:off x="548640" y="6355080"/>
+            <a:ext cx="11064240" cy="320040"/>
+          </a:xfrm>
+          <a:prstGeom prst="rect">
+            <a:avLst/>
+          </a:prstGeom>
+          <a:noFill/>
+        </p:spPr>
+        <p:txBody>
+          <a:bodyPr wrap="square">
+            <a:noAutofit/>
+          </a:bodyPr>
+          <a:lstStyle/>
+          <a:p>
+            <a:pPr algn="r">
+              <a:lnSpc>
+                <a:spcPts val="2200"/>
+              </a:lnSpc>
+              <a:defRPr sz="1000" b="0">
+                <a:solidFill>
+                  <a:srgbClr val="666666"/>
+                </a:solidFill>
+                <a:latin typeface="Calibri"/>
+              </a:defRPr>
+            </a:pPr>
+            <a:r>
+              <a:t>learn_uvm2017_sv_verilator / Module 1</a:t>
+            </a:r>
+          </a:p>
+        </p:txBody>
+      </p:sp>
+    </p:spTree>
+  </p:cSld>
+  <p:clrMapOvr>
+    <a:masterClrMapping/>
+  </p:clrMapOvr>
+</p:sld>
+</file>
+
+<file path=ppt/slides/slide56.xml><?xml version="1.0" encoding="utf-8"?>
+<p:sld xmlns:a="http://schemas.openxmlformats.org/drawingml/2006/main" xmlns:p="http://schemas.openxmlformats.org/presentationml/2006/main" xmlns:r="http://schemas.openxmlformats.org/officeDocument/2006/relationships">
+  <p:cSld>
+    <p:spTree>
+      <p:nvGrpSpPr>
+        <p:cNvPr id="1" name=""/>
+        <p:cNvGrpSpPr/>
+        <p:nvPr/>
+      </p:nvGrpSpPr>
+      <p:grpSpPr/>
+      <p:sp>
+        <p:nvSpPr>
+          <p:cNvPr id="2" name="TextBox 1"/>
+          <p:cNvSpPr txBox="1"/>
+          <p:nvPr/>
+        </p:nvSpPr>
+        <p:spPr>
+          <a:xfrm>
+            <a:off x="548640" y="411480"/>
+            <a:ext cx="11064240" cy="777240"/>
+          </a:xfrm>
+          <a:prstGeom prst="rect">
+            <a:avLst/>
+          </a:prstGeom>
+          <a:noFill/>
+        </p:spPr>
+        <p:txBody>
+          <a:bodyPr wrap="square">
+            <a:noAutofit/>
+          </a:bodyPr>
+          <a:lstStyle/>
+          <a:p>
+            <a:pPr>
+              <a:lnSpc>
+                <a:spcPts val="2200"/>
+              </a:lnSpc>
+              <a:defRPr sz="2800" b="1">
+                <a:solidFill>
+                  <a:srgbClr val="1A1A2E"/>
+                </a:solidFill>
+                <a:latin typeface="Calibri"/>
+              </a:defRPr>
+            </a:pPr>
+            <a:r>
+              <a:t>Example 4: Data Structures</a:t>
+            </a:r>
+          </a:p>
+        </p:txBody>
+      </p:sp>
+      <p:sp>
+        <p:nvSpPr>
+          <p:cNvPr id="3" name="TextBox 2"/>
+          <p:cNvSpPr txBox="1"/>
+          <p:nvPr/>
+        </p:nvSpPr>
+        <p:spPr>
+          <a:xfrm>
+            <a:off x="548640" y="1234440"/>
+            <a:ext cx="11064240" cy="4937760"/>
+          </a:xfrm>
+          <a:prstGeom prst="rect">
+            <a:avLst/>
+          </a:prstGeom>
+          <a:noFill/>
+        </p:spPr>
+        <p:txBody>
+          <a:bodyPr wrap="square">
+            <a:noAutofit/>
+          </a:bodyPr>
+          <a:lstStyle/>
+          <a:p>
+            <a:pPr>
+              <a:lnSpc>
+                <a:spcPts val="2200"/>
+              </a:lnSpc>
+              <a:spcAft>
+                <a:spcPts val="1000"/>
+              </a:spcAft>
+              <a:defRPr sz="2000" b="0">
+                <a:solidFill>
+                  <a:srgbClr val="333333"/>
+                </a:solidFill>
+                <a:latin typeface="Calibri"/>
+              </a:defRPr>
+            </a:pPr>
+            <a:r>
+              <a:t>• Dynamic Arrays: Transaction arrays that grow</a:t>
+            </a:r>
+          </a:p>
+          <a:p>
+            <a:pPr>
+              <a:lnSpc>
+                <a:spcPts val="2200"/>
+              </a:lnSpc>
+              <a:spcAft>
+                <a:spcPts val="1000"/>
+              </a:spcAft>
+              <a:defRPr sz="2000" b="0">
+                <a:solidFill>
+                  <a:srgbClr val="333333"/>
+                </a:solidFill>
+                <a:latin typeface="Calibri"/>
+              </a:defRPr>
+            </a:pPr>
+            <a:r>
+              <a:t>      dynamically</a:t>
+            </a:r>
+          </a:p>
+          <a:p>
+            <a:pPr>
+              <a:lnSpc>
+                <a:spcPts val="2200"/>
+              </a:lnSpc>
+              <a:spcAft>
+                <a:spcPts val="1000"/>
+              </a:spcAft>
+              <a:defRPr sz="2000" b="0">
+                <a:solidFill>
+                  <a:srgbClr val="333333"/>
+                </a:solidFill>
+                <a:latin typeface="Calibri"/>
+              </a:defRPr>
+            </a:pPr>
+            <a:r>
+              <a:t>• Queues: FIFO queues for transaction management</a:t>
+            </a:r>
+          </a:p>
+          <a:p>
+            <a:pPr>
+              <a:lnSpc>
+                <a:spcPts val="2200"/>
+              </a:lnSpc>
+              <a:spcAft>
+                <a:spcPts val="1000"/>
+              </a:spcAft>
+              <a:defRPr sz="2000" b="0">
+                <a:solidFill>
+                  <a:srgbClr val="333333"/>
+                </a:solidFill>
+                <a:latin typeface="Calibri"/>
+              </a:defRPr>
+            </a:pPr>
+            <a:r>
+              <a:t>• Associative Arrays: Indexed by transaction ID</a:t>
+            </a:r>
+          </a:p>
+        </p:txBody>
+      </p:sp>
+      <p:sp>
+        <p:nvSpPr>
+          <p:cNvPr id="4" name="TextBox 3"/>
+          <p:cNvSpPr txBox="1"/>
+          <p:nvPr/>
+        </p:nvSpPr>
+        <p:spPr>
+          <a:xfrm>
+            <a:off x="548640" y="6355080"/>
+            <a:ext cx="11064240" cy="320040"/>
+          </a:xfrm>
+          <a:prstGeom prst="rect">
+            <a:avLst/>
+          </a:prstGeom>
+          <a:noFill/>
+        </p:spPr>
+        <p:txBody>
+          <a:bodyPr wrap="square">
+            <a:noAutofit/>
+          </a:bodyPr>
+          <a:lstStyle/>
+          <a:p>
+            <a:pPr algn="r">
+              <a:lnSpc>
+                <a:spcPts val="2200"/>
+              </a:lnSpc>
+              <a:defRPr sz="1000" b="0">
+                <a:solidFill>
+                  <a:srgbClr val="666666"/>
+                </a:solidFill>
+                <a:latin typeface="Calibri"/>
+              </a:defRPr>
+            </a:pPr>
+            <a:r>
+              <a:t>learn_uvm2017_sv_verilator / Module 1</a:t>
+            </a:r>
+          </a:p>
+        </p:txBody>
+      </p:sp>
+    </p:spTree>
+  </p:cSld>
+  <p:clrMapOvr>
+    <a:masterClrMapping/>
+  </p:clrMapOvr>
+</p:sld>
+</file>
+
+<file path=ppt/slides/slide57.xml><?xml version="1.0" encoding="utf-8"?>
+<p:sld xmlns:a="http://schemas.openxmlformats.org/drawingml/2006/main" xmlns:p="http://schemas.openxmlformats.org/presentationml/2006/main" xmlns:r="http://schemas.openxmlformats.org/officeDocument/2006/relationships">
+  <p:cSld>
+    <p:spTree>
+      <p:nvGrpSpPr>
+        <p:cNvPr id="1" name=""/>
+        <p:cNvGrpSpPr/>
+        <p:nvPr/>
+      </p:nvGrpSpPr>
+      <p:grpSpPr/>
+      <p:sp>
+        <p:nvSpPr>
+          <p:cNvPr id="2" name="TextBox 1"/>
+          <p:cNvSpPr txBox="1"/>
+          <p:nvPr/>
+        </p:nvSpPr>
+        <p:spPr>
+          <a:xfrm>
+            <a:off x="548640" y="411480"/>
+            <a:ext cx="11064240" cy="777240"/>
+          </a:xfrm>
+          <a:prstGeom prst="rect">
+            <a:avLst/>
+          </a:prstGeom>
+          <a:noFill/>
+        </p:spPr>
+        <p:txBody>
+          <a:bodyPr wrap="square">
+            <a:noAutofit/>
+          </a:bodyPr>
+          <a:lstStyle/>
+          <a:p>
+            <a:pPr>
+              <a:lnSpc>
+                <a:spcPts val="2200"/>
+              </a:lnSpc>
+              <a:defRPr sz="2800" b="1">
+                <a:solidFill>
+                  <a:srgbClr val="1A1A2E"/>
+                </a:solidFill>
+                <a:latin typeface="Calibri"/>
+              </a:defRPr>
+            </a:pPr>
+            <a:r>
+              <a:t>Demo: Data Structures</a:t>
+            </a:r>
+          </a:p>
+        </p:txBody>
+      </p:sp>
+      <p:sp>
+        <p:nvSpPr>
+          <p:cNvPr id="3" name="TextBox 2"/>
+          <p:cNvSpPr txBox="1"/>
+          <p:nvPr/>
+        </p:nvSpPr>
+        <p:spPr>
+          <a:xfrm>
+            <a:off x="548640" y="1051560"/>
+            <a:ext cx="11064240" cy="914400"/>
+          </a:xfrm>
+          <a:prstGeom prst="rect">
+            <a:avLst/>
+          </a:prstGeom>
+          <a:solidFill>
+            <a:srgbClr val="F4F4F4"/>
+          </a:solidFill>
+        </p:spPr>
+        <p:txBody>
+          <a:bodyPr wrap="square">
+            <a:noAutofit/>
+          </a:bodyPr>
+          <a:lstStyle/>
+          <a:p>
+            <a:pPr>
+              <a:lnSpc>
+                <a:spcPts val="2200"/>
+              </a:lnSpc>
+              <a:spcAft>
+                <a:spcPts val="200"/>
+              </a:spcAft>
+              <a:defRPr sz="2000" b="0">
+                <a:solidFill>
+                  <a:srgbClr val="333333"/>
+                </a:solidFill>
+                <a:latin typeface="Consolas"/>
+              </a:defRPr>
+            </a:pPr>
+            <a:r>
+              <a:t>$ ./scripts/module1.sh --data-structures</a:t>
+            </a:r>
+          </a:p>
+        </p:txBody>
+      </p:sp>
+      <p:pic>
+        <p:nvPicPr>
+          <p:cNvPr id="4" name="Picture 3" descr="ex04_data_structures.png"/>
+          <p:cNvPicPr>
+            <a:picLocks noChangeAspect="1"/>
+          </p:cNvPicPr>
+          <p:nvPr/>
+        </p:nvPicPr>
+        <p:blipFill>
+          <a:blip r:embed="rId2"/>
+          <a:stretch>
+            <a:fillRect/>
+          </a:stretch>
+        </p:blipFill>
+        <p:spPr>
+          <a:xfrm>
+            <a:off x="548640" y="1965960"/>
+            <a:ext cx="7071358" cy="3977639"/>
+          </a:xfrm>
+          <a:prstGeom prst="rect">
+            <a:avLst/>
+          </a:prstGeom>
+        </p:spPr>
+      </p:pic>
+      <p:sp>
+        <p:nvSpPr>
+          <p:cNvPr id="5" name="TextBox 4"/>
+          <p:cNvSpPr txBox="1"/>
+          <p:nvPr/>
+        </p:nvSpPr>
+        <p:spPr>
+          <a:xfrm>
+            <a:off x="548640" y="6355080"/>
+            <a:ext cx="11064240" cy="320040"/>
+          </a:xfrm>
+          <a:prstGeom prst="rect">
+            <a:avLst/>
+          </a:prstGeom>
+          <a:noFill/>
+        </p:spPr>
+        <p:txBody>
+          <a:bodyPr wrap="square">
+            <a:noAutofit/>
+          </a:bodyPr>
+          <a:lstStyle/>
+          <a:p>
+            <a:pPr algn="r">
+              <a:lnSpc>
+                <a:spcPts val="2200"/>
+              </a:lnSpc>
+              <a:defRPr sz="1000" b="0">
+                <a:solidFill>
+                  <a:srgbClr val="666666"/>
+                </a:solidFill>
+                <a:latin typeface="Calibri"/>
+              </a:defRPr>
+            </a:pPr>
+            <a:r>
+              <a:t>learn_uvm2017_sv_verilator / Module 1</a:t>
+            </a:r>
+          </a:p>
+        </p:txBody>
+      </p:sp>
+    </p:spTree>
+  </p:cSld>
+  <p:clrMapOvr>
+    <a:masterClrMapping/>
+  </p:clrMapOvr>
+</p:sld>
+</file>
+
+<file path=ppt/slides/slide58.xml><?xml version="1.0" encoding="utf-8"?>
+<p:sld xmlns:a="http://schemas.openxmlformats.org/drawingml/2006/main" xmlns:p="http://schemas.openxmlformats.org/presentationml/2006/main" xmlns:r="http://schemas.openxmlformats.org/officeDocument/2006/relationships">
+  <p:cSld>
+    <p:spTree>
+      <p:nvGrpSpPr>
+        <p:cNvPr id="1" name=""/>
+        <p:cNvGrpSpPr/>
+        <p:nvPr/>
+      </p:nvGrpSpPr>
+      <p:grpSpPr/>
+      <p:sp>
+        <p:nvSpPr>
+          <p:cNvPr id="2" name="TextBox 1"/>
+          <p:cNvSpPr txBox="1"/>
+          <p:nvPr/>
+        </p:nvSpPr>
+        <p:spPr>
+          <a:xfrm>
+            <a:off x="548640" y="411480"/>
+            <a:ext cx="11064240" cy="777240"/>
+          </a:xfrm>
+          <a:prstGeom prst="rect">
+            <a:avLst/>
+          </a:prstGeom>
+          <a:noFill/>
+        </p:spPr>
+        <p:txBody>
+          <a:bodyPr wrap="square">
+            <a:noAutofit/>
+          </a:bodyPr>
+          <a:lstStyle/>
+          <a:p>
+            <a:pPr>
+              <a:lnSpc>
+                <a:spcPts val="2200"/>
+              </a:lnSpc>
+              <a:defRPr sz="2800" b="1">
+                <a:solidFill>
+                  <a:srgbClr val="1A1A2E"/>
+                </a:solidFill>
+                <a:latin typeface="Calibri"/>
+              </a:defRPr>
+            </a:pPr>
+            <a:r>
+              <a:t>Example 5: Error Handling</a:t>
+            </a:r>
+          </a:p>
+        </p:txBody>
+      </p:sp>
+      <p:sp>
+        <p:nvSpPr>
+          <p:cNvPr id="3" name="TextBox 2"/>
+          <p:cNvSpPr txBox="1"/>
+          <p:nvPr/>
+        </p:nvSpPr>
+        <p:spPr>
+          <a:xfrm>
+            <a:off x="548640" y="1234440"/>
+            <a:ext cx="11064240" cy="4937760"/>
+          </a:xfrm>
+          <a:prstGeom prst="rect">
+            <a:avLst/>
+          </a:prstGeom>
+          <a:noFill/>
+        </p:spPr>
+        <p:txBody>
+          <a:bodyPr wrap="square">
+            <a:noAutofit/>
+          </a:bodyPr>
+          <a:lstStyle/>
+          <a:p>
+            <a:pPr>
+              <a:lnSpc>
+                <a:spcPts val="2200"/>
+              </a:lnSpc>
+              <a:spcAft>
+                <a:spcPts val="1000"/>
+              </a:spcAft>
+              <a:defRPr sz="2000" b="0">
+                <a:solidFill>
+                  <a:srgbClr val="333333"/>
+                </a:solidFill>
+                <a:latin typeface="Calibri"/>
+              </a:defRPr>
+            </a:pPr>
+            <a:r>
+              <a:t>• UVM Reporting: Using `uvm_report_info()`,</a:t>
+            </a:r>
+          </a:p>
+          <a:p>
+            <a:pPr>
+              <a:lnSpc>
+                <a:spcPts val="2200"/>
+              </a:lnSpc>
+              <a:spcAft>
+                <a:spcPts val="1000"/>
+              </a:spcAft>
+              <a:defRPr sz="2000" b="0">
+                <a:solidFill>
+                  <a:srgbClr val="333333"/>
+                </a:solidFill>
+                <a:latin typeface="Calibri"/>
+              </a:defRPr>
+            </a:pPr>
+            <a:r>
+              <a:t>      `uvm_report_error()`, etc.</a:t>
+            </a:r>
+          </a:p>
+          <a:p>
+            <a:pPr>
+              <a:lnSpc>
+                <a:spcPts val="2200"/>
+              </a:lnSpc>
+              <a:spcAft>
+                <a:spcPts val="1000"/>
+              </a:spcAft>
+              <a:defRPr sz="2000" b="0">
+                <a:solidFill>
+                  <a:srgbClr val="333333"/>
+                </a:solidFill>
+                <a:latin typeface="Calibri"/>
+              </a:defRPr>
+            </a:pPr>
+            <a:r>
+              <a:t>• Assertions: Immediate and concurrent assertions</a:t>
+            </a:r>
+          </a:p>
+          <a:p>
+            <a:pPr>
+              <a:lnSpc>
+                <a:spcPts val="2200"/>
+              </a:lnSpc>
+              <a:spcAft>
+                <a:spcPts val="1000"/>
+              </a:spcAft>
+              <a:defRPr sz="2000" b="0">
+                <a:solidFill>
+                  <a:srgbClr val="333333"/>
+                </a:solidFill>
+                <a:latin typeface="Calibri"/>
+              </a:defRPr>
+            </a:pPr>
+            <a:r>
+              <a:t>• Error Handling: Try-catch blocks for exception</a:t>
+            </a:r>
+          </a:p>
+          <a:p>
+            <a:pPr>
+              <a:lnSpc>
+                <a:spcPts val="2200"/>
+              </a:lnSpc>
+              <a:spcAft>
+                <a:spcPts val="1000"/>
+              </a:spcAft>
+              <a:defRPr sz="2000" b="0">
+                <a:solidFill>
+                  <a:srgbClr val="333333"/>
+                </a:solidFill>
+                <a:latin typeface="Calibri"/>
+              </a:defRPr>
+            </a:pPr>
+            <a:r>
+              <a:t>      handling</a:t>
+            </a:r>
+          </a:p>
+        </p:txBody>
+      </p:sp>
+      <p:sp>
+        <p:nvSpPr>
+          <p:cNvPr id="4" name="TextBox 3"/>
+          <p:cNvSpPr txBox="1"/>
+          <p:nvPr/>
+        </p:nvSpPr>
+        <p:spPr>
+          <a:xfrm>
+            <a:off x="548640" y="6355080"/>
+            <a:ext cx="11064240" cy="320040"/>
+          </a:xfrm>
+          <a:prstGeom prst="rect">
+            <a:avLst/>
+          </a:prstGeom>
+          <a:noFill/>
+        </p:spPr>
+        <p:txBody>
+          <a:bodyPr wrap="square">
+            <a:noAutofit/>
+          </a:bodyPr>
+          <a:lstStyle/>
+          <a:p>
+            <a:pPr algn="r">
+              <a:lnSpc>
+                <a:spcPts val="2200"/>
+              </a:lnSpc>
+              <a:defRPr sz="1000" b="0">
+                <a:solidFill>
+                  <a:srgbClr val="666666"/>
+                </a:solidFill>
+                <a:latin typeface="Calibri"/>
+              </a:defRPr>
+            </a:pPr>
+            <a:r>
+              <a:t>learn_uvm2017_sv_verilator / Module 1</a:t>
+            </a:r>
+          </a:p>
+        </p:txBody>
+      </p:sp>
+    </p:spTree>
+  </p:cSld>
+  <p:clrMapOvr>
+    <a:masterClrMapping/>
+  </p:clrMapOvr>
+</p:sld>
+</file>
+
+<file path=ppt/slides/slide59.xml><?xml version="1.0" encoding="utf-8"?>
+<p:sld xmlns:a="http://schemas.openxmlformats.org/drawingml/2006/main" xmlns:p="http://schemas.openxmlformats.org/presentationml/2006/main" xmlns:r="http://schemas.openxmlformats.org/officeDocument/2006/relationships">
+  <p:cSld>
+    <p:spTree>
+      <p:nvGrpSpPr>
+        <p:cNvPr id="1" name=""/>
+        <p:cNvGrpSpPr/>
+        <p:nvPr/>
+      </p:nvGrpSpPr>
+      <p:grpSpPr/>
+      <p:sp>
+        <p:nvSpPr>
+          <p:cNvPr id="2" name="TextBox 1"/>
+          <p:cNvSpPr txBox="1"/>
+          <p:nvPr/>
+        </p:nvSpPr>
+        <p:spPr>
+          <a:xfrm>
+            <a:off x="548640" y="411480"/>
+            <a:ext cx="11064240" cy="777240"/>
+          </a:xfrm>
+          <a:prstGeom prst="rect">
+            <a:avLst/>
+          </a:prstGeom>
+          <a:noFill/>
+        </p:spPr>
+        <p:txBody>
+          <a:bodyPr wrap="square">
+            <a:noAutofit/>
+          </a:bodyPr>
+          <a:lstStyle/>
+          <a:p>
+            <a:pPr>
+              <a:lnSpc>
+                <a:spcPts val="2200"/>
+              </a:lnSpc>
+              <a:defRPr sz="2800" b="1">
+                <a:solidFill>
+                  <a:srgbClr val="1A1A2E"/>
+                </a:solidFill>
+                <a:latin typeface="Calibri"/>
+              </a:defRPr>
+            </a:pPr>
+            <a:r>
+              <a:t>Demo: Error Handling</a:t>
+            </a:r>
+          </a:p>
+        </p:txBody>
+      </p:sp>
+      <p:sp>
+        <p:nvSpPr>
+          <p:cNvPr id="3" name="TextBox 2"/>
+          <p:cNvSpPr txBox="1"/>
+          <p:nvPr/>
+        </p:nvSpPr>
+        <p:spPr>
+          <a:xfrm>
+            <a:off x="548640" y="1051560"/>
+            <a:ext cx="11064240" cy="914400"/>
+          </a:xfrm>
+          <a:prstGeom prst="rect">
+            <a:avLst/>
+          </a:prstGeom>
+          <a:solidFill>
+            <a:srgbClr val="F4F4F4"/>
+          </a:solidFill>
+        </p:spPr>
+        <p:txBody>
+          <a:bodyPr wrap="square">
+            <a:noAutofit/>
+          </a:bodyPr>
+          <a:lstStyle/>
+          <a:p>
+            <a:pPr>
+              <a:lnSpc>
+                <a:spcPts val="2200"/>
+              </a:lnSpc>
+              <a:spcAft>
+                <a:spcPts val="200"/>
+              </a:spcAft>
+              <a:defRPr sz="2000" b="0">
+                <a:solidFill>
+                  <a:srgbClr val="333333"/>
+                </a:solidFill>
+                <a:latin typeface="Consolas"/>
+              </a:defRPr>
+            </a:pPr>
+            <a:r>
+              <a:t>$ ./scripts/module1.sh --error-handling</a:t>
+            </a:r>
+          </a:p>
+        </p:txBody>
+      </p:sp>
+      <p:pic>
+        <p:nvPicPr>
+          <p:cNvPr id="4" name="Picture 3" descr="ex05_error_handling.png"/>
+          <p:cNvPicPr>
+            <a:picLocks noChangeAspect="1"/>
+          </p:cNvPicPr>
+          <p:nvPr/>
+        </p:nvPicPr>
+        <p:blipFill>
+          <a:blip r:embed="rId2"/>
+          <a:stretch>
+            <a:fillRect/>
+          </a:stretch>
+        </p:blipFill>
+        <p:spPr>
+          <a:xfrm>
+            <a:off x="548640" y="1965960"/>
+            <a:ext cx="7071358" cy="3977639"/>
+          </a:xfrm>
+          <a:prstGeom prst="rect">
+            <a:avLst/>
+          </a:prstGeom>
+        </p:spPr>
+      </p:pic>
+      <p:sp>
+        <p:nvSpPr>
+          <p:cNvPr id="5" name="TextBox 4"/>
           <p:cNvSpPr txBox="1"/>
           <p:nvPr/>
         </p:nvSpPr>
@@ -17707,6 +19673,1153 @@
       <p:sp>
         <p:nvSpPr>
           <p:cNvPr id="3" name="TextBox 2"/>
+          <p:cNvSpPr txBox="1"/>
+          <p:nvPr/>
+        </p:nvSpPr>
+        <p:spPr>
+          <a:xfrm>
+            <a:off x="548640" y="6355080"/>
+            <a:ext cx="11064240" cy="320040"/>
+          </a:xfrm>
+          <a:prstGeom prst="rect">
+            <a:avLst/>
+          </a:prstGeom>
+          <a:noFill/>
+        </p:spPr>
+        <p:txBody>
+          <a:bodyPr wrap="square">
+            <a:noAutofit/>
+          </a:bodyPr>
+          <a:lstStyle/>
+          <a:p>
+            <a:pPr algn="r">
+              <a:lnSpc>
+                <a:spcPts val="2200"/>
+              </a:lnSpc>
+              <a:defRPr sz="1000" b="0">
+                <a:solidFill>
+                  <a:srgbClr val="666666"/>
+                </a:solidFill>
+                <a:latin typeface="Calibri"/>
+              </a:defRPr>
+            </a:pPr>
+            <a:r>
+              <a:t>learn_uvm2017_sv_verilator / Module 1</a:t>
+            </a:r>
+          </a:p>
+        </p:txBody>
+      </p:sp>
+    </p:spTree>
+  </p:cSld>
+  <p:clrMapOvr>
+    <a:masterClrMapping/>
+  </p:clrMapOvr>
+</p:sld>
+</file>
+
+<file path=ppt/slides/slide60.xml><?xml version="1.0" encoding="utf-8"?>
+<p:sld xmlns:a="http://schemas.openxmlformats.org/drawingml/2006/main" xmlns:p="http://schemas.openxmlformats.org/presentationml/2006/main" xmlns:r="http://schemas.openxmlformats.org/officeDocument/2006/relationships">
+  <p:cSld>
+    <p:spTree>
+      <p:nvGrpSpPr>
+        <p:cNvPr id="1" name=""/>
+        <p:cNvGrpSpPr/>
+        <p:nvPr/>
+      </p:nvGrpSpPr>
+      <p:grpSpPr/>
+      <p:sp>
+        <p:nvSpPr>
+          <p:cNvPr id="2" name="TextBox 1"/>
+          <p:cNvSpPr txBox="1"/>
+          <p:nvPr/>
+        </p:nvSpPr>
+        <p:spPr>
+          <a:xfrm>
+            <a:off x="548640" y="2743200"/>
+            <a:ext cx="11064240" cy="1371600"/>
+          </a:xfrm>
+          <a:prstGeom prst="rect">
+            <a:avLst/>
+          </a:prstGeom>
+          <a:noFill/>
+        </p:spPr>
+        <p:txBody>
+          <a:bodyPr wrap="square">
+            <a:noAutofit/>
+          </a:bodyPr>
+          <a:lstStyle/>
+          <a:p>
+            <a:pPr algn="ctr">
+              <a:lnSpc>
+                <a:spcPts val="2200"/>
+              </a:lnSpc>
+              <a:defRPr sz="3600" b="1">
+                <a:solidFill>
+                  <a:srgbClr val="1A1A2E"/>
+                </a:solidFill>
+                <a:latin typeface="Calibri"/>
+              </a:defRPr>
+            </a:pPr>
+            <a:r>
+              <a:t>Practice &amp; assessment</a:t>
+            </a:r>
+          </a:p>
+        </p:txBody>
+      </p:sp>
+      <p:sp>
+        <p:nvSpPr>
+          <p:cNvPr id="3" name="TextBox 2"/>
+          <p:cNvSpPr txBox="1"/>
+          <p:nvPr/>
+        </p:nvSpPr>
+        <p:spPr>
+          <a:xfrm>
+            <a:off x="548640" y="6355080"/>
+            <a:ext cx="11064240" cy="320040"/>
+          </a:xfrm>
+          <a:prstGeom prst="rect">
+            <a:avLst/>
+          </a:prstGeom>
+          <a:noFill/>
+        </p:spPr>
+        <p:txBody>
+          <a:bodyPr wrap="square">
+            <a:noAutofit/>
+          </a:bodyPr>
+          <a:lstStyle/>
+          <a:p>
+            <a:pPr algn="r">
+              <a:lnSpc>
+                <a:spcPts val="2200"/>
+              </a:lnSpc>
+              <a:defRPr sz="1000" b="0">
+                <a:solidFill>
+                  <a:srgbClr val="666666"/>
+                </a:solidFill>
+                <a:latin typeface="Calibri"/>
+              </a:defRPr>
+            </a:pPr>
+            <a:r>
+              <a:t>learn_uvm2017_sv_verilator / Module 1</a:t>
+            </a:r>
+          </a:p>
+        </p:txBody>
+      </p:sp>
+    </p:spTree>
+  </p:cSld>
+  <p:clrMapOvr>
+    <a:masterClrMapping/>
+  </p:clrMapOvr>
+</p:sld>
+</file>
+
+<file path=ppt/slides/slide61.xml><?xml version="1.0" encoding="utf-8"?>
+<p:sld xmlns:a="http://schemas.openxmlformats.org/drawingml/2006/main" xmlns:p="http://schemas.openxmlformats.org/presentationml/2006/main" xmlns:r="http://schemas.openxmlformats.org/officeDocument/2006/relationships">
+  <p:cSld>
+    <p:spTree>
+      <p:nvGrpSpPr>
+        <p:cNvPr id="1" name=""/>
+        <p:cNvGrpSpPr/>
+        <p:nvPr/>
+      </p:nvGrpSpPr>
+      <p:grpSpPr/>
+      <p:sp>
+        <p:nvSpPr>
+          <p:cNvPr id="2" name="TextBox 1"/>
+          <p:cNvSpPr txBox="1"/>
+          <p:nvPr/>
+        </p:nvSpPr>
+        <p:spPr>
+          <a:xfrm>
+            <a:off x="548640" y="411480"/>
+            <a:ext cx="11064240" cy="777240"/>
+          </a:xfrm>
+          <a:prstGeom prst="rect">
+            <a:avLst/>
+          </a:prstGeom>
+          <a:noFill/>
+        </p:spPr>
+        <p:txBody>
+          <a:bodyPr wrap="square">
+            <a:noAutofit/>
+          </a:bodyPr>
+          <a:lstStyle/>
+          <a:p>
+            <a:pPr>
+              <a:lnSpc>
+                <a:spcPts val="2200"/>
+              </a:lnSpc>
+              <a:defRPr sz="2800" b="1">
+                <a:solidFill>
+                  <a:srgbClr val="1A1A2E"/>
+                </a:solidFill>
+                <a:latin typeface="Calibri"/>
+              </a:defRPr>
+            </a:pPr>
+            <a:r>
+              <a:t>What you should know (1/2)</a:t>
+            </a:r>
+          </a:p>
+        </p:txBody>
+      </p:sp>
+      <p:sp>
+        <p:nvSpPr>
+          <p:cNvPr id="3" name="TextBox 2"/>
+          <p:cNvSpPr txBox="1"/>
+          <p:nvPr/>
+        </p:nvSpPr>
+        <p:spPr>
+          <a:xfrm>
+            <a:off x="548640" y="1234440"/>
+            <a:ext cx="11064240" cy="4937760"/>
+          </a:xfrm>
+          <a:prstGeom prst="rect">
+            <a:avLst/>
+          </a:prstGeom>
+          <a:noFill/>
+        </p:spPr>
+        <p:txBody>
+          <a:bodyPr wrap="square">
+            <a:noAutofit/>
+          </a:bodyPr>
+          <a:lstStyle/>
+          <a:p>
+            <a:pPr>
+              <a:lnSpc>
+                <a:spcPts val="2200"/>
+              </a:lnSpc>
+              <a:spcAft>
+                <a:spcPts val="1000"/>
+              </a:spcAft>
+              <a:defRPr sz="2000" b="0">
+                <a:solidFill>
+                  <a:srgbClr val="333333"/>
+                </a:solidFill>
+                <a:latin typeface="Calibri"/>
+              </a:defRPr>
+            </a:pPr>
+            <a:r>
+              <a:t>• Understand SystemVerilog OOP concepts</a:t>
+            </a:r>
+          </a:p>
+          <a:p>
+            <a:pPr>
+              <a:lnSpc>
+                <a:spcPts val="2200"/>
+              </a:lnSpc>
+              <a:spcAft>
+                <a:spcPts val="1000"/>
+              </a:spcAft>
+              <a:defRPr sz="2000" b="0">
+                <a:solidFill>
+                  <a:srgbClr val="333333"/>
+                </a:solidFill>
+                <a:latin typeface="Calibri"/>
+              </a:defRPr>
+            </a:pPr>
+            <a:r>
+              <a:t>• Create and use SystemVerilog classes</a:t>
+            </a:r>
+          </a:p>
+          <a:p>
+            <a:pPr>
+              <a:lnSpc>
+                <a:spcPts val="2200"/>
+              </a:lnSpc>
+              <a:spcAft>
+                <a:spcPts val="1000"/>
+              </a:spcAft>
+              <a:defRPr sz="2000" b="0">
+                <a:solidFill>
+                  <a:srgbClr val="333333"/>
+                </a:solidFill>
+                <a:latin typeface="Calibri"/>
+              </a:defRPr>
+            </a:pPr>
+            <a:r>
+              <a:t>• Design interfaces with modports</a:t>
+            </a:r>
+          </a:p>
+          <a:p>
+            <a:pPr>
+              <a:lnSpc>
+                <a:spcPts val="2200"/>
+              </a:lnSpc>
+              <a:spcAft>
+                <a:spcPts val="1000"/>
+              </a:spcAft>
+              <a:defRPr sz="2000" b="0">
+                <a:solidFill>
+                  <a:srgbClr val="333333"/>
+                </a:solidFill>
+                <a:latin typeface="Calibri"/>
+              </a:defRPr>
+            </a:pPr>
+            <a:r>
+              <a:t>• Organize code using packages</a:t>
+            </a:r>
+          </a:p>
+          <a:p>
+            <a:pPr>
+              <a:lnSpc>
+                <a:spcPts val="2200"/>
+              </a:lnSpc>
+              <a:spcAft>
+                <a:spcPts val="1000"/>
+              </a:spcAft>
+              <a:defRPr sz="2000" b="0">
+                <a:solidFill>
+                  <a:srgbClr val="333333"/>
+                </a:solidFill>
+                <a:latin typeface="Calibri"/>
+              </a:defRPr>
+            </a:pPr>
+            <a:r>
+              <a:t>• Use appropriate data structures for verification</a:t>
+            </a:r>
+          </a:p>
+          <a:p>
+            <a:pPr>
+              <a:lnSpc>
+                <a:spcPts val="2200"/>
+              </a:lnSpc>
+              <a:spcAft>
+                <a:spcPts val="1000"/>
+              </a:spcAft>
+              <a:defRPr sz="2000" b="0">
+                <a:solidFill>
+                  <a:srgbClr val="333333"/>
+                </a:solidFill>
+                <a:latin typeface="Calibri"/>
+              </a:defRPr>
+            </a:pPr>
+            <a:r>
+              <a:t>• Implement error handling and logging</a:t>
+            </a:r>
+          </a:p>
+        </p:txBody>
+      </p:sp>
+      <p:sp>
+        <p:nvSpPr>
+          <p:cNvPr id="4" name="TextBox 3"/>
+          <p:cNvSpPr txBox="1"/>
+          <p:nvPr/>
+        </p:nvSpPr>
+        <p:spPr>
+          <a:xfrm>
+            <a:off x="548640" y="6355080"/>
+            <a:ext cx="11064240" cy="320040"/>
+          </a:xfrm>
+          <a:prstGeom prst="rect">
+            <a:avLst/>
+          </a:prstGeom>
+          <a:noFill/>
+        </p:spPr>
+        <p:txBody>
+          <a:bodyPr wrap="square">
+            <a:noAutofit/>
+          </a:bodyPr>
+          <a:lstStyle/>
+          <a:p>
+            <a:pPr algn="r">
+              <a:lnSpc>
+                <a:spcPts val="2200"/>
+              </a:lnSpc>
+              <a:defRPr sz="1000" b="0">
+                <a:solidFill>
+                  <a:srgbClr val="666666"/>
+                </a:solidFill>
+                <a:latin typeface="Calibri"/>
+              </a:defRPr>
+            </a:pPr>
+            <a:r>
+              <a:t>learn_uvm2017_sv_verilator / Module 1</a:t>
+            </a:r>
+          </a:p>
+        </p:txBody>
+      </p:sp>
+    </p:spTree>
+  </p:cSld>
+  <p:clrMapOvr>
+    <a:masterClrMapping/>
+  </p:clrMapOvr>
+</p:sld>
+</file>
+
+<file path=ppt/slides/slide62.xml><?xml version="1.0" encoding="utf-8"?>
+<p:sld xmlns:a="http://schemas.openxmlformats.org/drawingml/2006/main" xmlns:p="http://schemas.openxmlformats.org/presentationml/2006/main" xmlns:r="http://schemas.openxmlformats.org/officeDocument/2006/relationships">
+  <p:cSld>
+    <p:spTree>
+      <p:nvGrpSpPr>
+        <p:cNvPr id="1" name=""/>
+        <p:cNvGrpSpPr/>
+        <p:nvPr/>
+      </p:nvGrpSpPr>
+      <p:grpSpPr/>
+      <p:sp>
+        <p:nvSpPr>
+          <p:cNvPr id="2" name="TextBox 1"/>
+          <p:cNvSpPr txBox="1"/>
+          <p:nvPr/>
+        </p:nvSpPr>
+        <p:spPr>
+          <a:xfrm>
+            <a:off x="548640" y="411480"/>
+            <a:ext cx="11064240" cy="777240"/>
+          </a:xfrm>
+          <a:prstGeom prst="rect">
+            <a:avLst/>
+          </a:prstGeom>
+          <a:noFill/>
+        </p:spPr>
+        <p:txBody>
+          <a:bodyPr wrap="square">
+            <a:noAutofit/>
+          </a:bodyPr>
+          <a:lstStyle/>
+          <a:p>
+            <a:pPr>
+              <a:lnSpc>
+                <a:spcPts val="2200"/>
+              </a:lnSpc>
+              <a:defRPr sz="2800" b="1">
+                <a:solidFill>
+                  <a:srgbClr val="1A1A2E"/>
+                </a:solidFill>
+                <a:latin typeface="Calibri"/>
+              </a:defRPr>
+            </a:pPr>
+            <a:r>
+              <a:t>What you should know (2/2)</a:t>
+            </a:r>
+          </a:p>
+        </p:txBody>
+      </p:sp>
+      <p:sp>
+        <p:nvSpPr>
+          <p:cNvPr id="3" name="TextBox 2"/>
+          <p:cNvSpPr txBox="1"/>
+          <p:nvPr/>
+        </p:nvSpPr>
+        <p:spPr>
+          <a:xfrm>
+            <a:off x="548640" y="1234440"/>
+            <a:ext cx="11064240" cy="4937760"/>
+          </a:xfrm>
+          <a:prstGeom prst="rect">
+            <a:avLst/>
+          </a:prstGeom>
+          <a:noFill/>
+        </p:spPr>
+        <p:txBody>
+          <a:bodyPr wrap="square">
+            <a:noAutofit/>
+          </a:bodyPr>
+          <a:lstStyle/>
+          <a:p>
+            <a:pPr>
+              <a:lnSpc>
+                <a:spcPts val="2200"/>
+              </a:lnSpc>
+              <a:spcAft>
+                <a:spcPts val="1000"/>
+              </a:spcAft>
+              <a:defRPr sz="2000" b="0">
+                <a:solidFill>
+                  <a:srgbClr val="333333"/>
+                </a:solidFill>
+                <a:latin typeface="Calibri"/>
+              </a:defRPr>
+            </a:pPr>
+            <a:r>
+              <a:t>• Write basic SystemVerilog testbenches</a:t>
+            </a:r>
+          </a:p>
+          <a:p>
+            <a:pPr>
+              <a:lnSpc>
+                <a:spcPts val="2200"/>
+              </a:lnSpc>
+              <a:spcAft>
+                <a:spcPts val="1000"/>
+              </a:spcAft>
+              <a:defRPr sz="2000" b="0">
+                <a:solidFill>
+                  <a:srgbClr val="333333"/>
+                </a:solidFill>
+                <a:latin typeface="Calibri"/>
+              </a:defRPr>
+            </a:pPr>
+            <a:r>
+              <a:t>• Understand UVM class structure basics</a:t>
+            </a:r>
+          </a:p>
+        </p:txBody>
+      </p:sp>
+      <p:sp>
+        <p:nvSpPr>
+          <p:cNvPr id="4" name="TextBox 3"/>
+          <p:cNvSpPr txBox="1"/>
+          <p:nvPr/>
+        </p:nvSpPr>
+        <p:spPr>
+          <a:xfrm>
+            <a:off x="548640" y="6355080"/>
+            <a:ext cx="11064240" cy="320040"/>
+          </a:xfrm>
+          <a:prstGeom prst="rect">
+            <a:avLst/>
+          </a:prstGeom>
+          <a:noFill/>
+        </p:spPr>
+        <p:txBody>
+          <a:bodyPr wrap="square">
+            <a:noAutofit/>
+          </a:bodyPr>
+          <a:lstStyle/>
+          <a:p>
+            <a:pPr algn="r">
+              <a:lnSpc>
+                <a:spcPts val="2200"/>
+              </a:lnSpc>
+              <a:defRPr sz="1000" b="0">
+                <a:solidFill>
+                  <a:srgbClr val="666666"/>
+                </a:solidFill>
+                <a:latin typeface="Calibri"/>
+              </a:defRPr>
+            </a:pPr>
+            <a:r>
+              <a:t>learn_uvm2017_sv_verilator / Module 1</a:t>
+            </a:r>
+          </a:p>
+        </p:txBody>
+      </p:sp>
+    </p:spTree>
+  </p:cSld>
+  <p:clrMapOvr>
+    <a:masterClrMapping/>
+  </p:clrMapOvr>
+</p:sld>
+</file>
+
+<file path=ppt/slides/slide63.xml><?xml version="1.0" encoding="utf-8"?>
+<p:sld xmlns:a="http://schemas.openxmlformats.org/drawingml/2006/main" xmlns:p="http://schemas.openxmlformats.org/presentationml/2006/main" xmlns:r="http://schemas.openxmlformats.org/officeDocument/2006/relationships">
+  <p:cSld>
+    <p:spTree>
+      <p:nvGrpSpPr>
+        <p:cNvPr id="1" name=""/>
+        <p:cNvGrpSpPr/>
+        <p:nvPr/>
+      </p:nvGrpSpPr>
+      <p:grpSpPr/>
+      <p:sp>
+        <p:nvSpPr>
+          <p:cNvPr id="2" name="TextBox 1"/>
+          <p:cNvSpPr txBox="1"/>
+          <p:nvPr/>
+        </p:nvSpPr>
+        <p:spPr>
+          <a:xfrm>
+            <a:off x="548640" y="411480"/>
+            <a:ext cx="11064240" cy="777240"/>
+          </a:xfrm>
+          <a:prstGeom prst="rect">
+            <a:avLst/>
+          </a:prstGeom>
+          <a:noFill/>
+        </p:spPr>
+        <p:txBody>
+          <a:bodyPr wrap="square">
+            <a:noAutofit/>
+          </a:bodyPr>
+          <a:lstStyle/>
+          <a:p>
+            <a:pPr>
+              <a:lnSpc>
+                <a:spcPts val="2200"/>
+              </a:lnSpc>
+              <a:defRPr sz="2800" b="1">
+                <a:solidFill>
+                  <a:srgbClr val="1A1A2E"/>
+                </a:solidFill>
+                <a:latin typeface="Calibri"/>
+              </a:defRPr>
+            </a:pPr>
+            <a:r>
+              <a:t>Exercises</a:t>
+            </a:r>
+          </a:p>
+        </p:txBody>
+      </p:sp>
+      <p:sp>
+        <p:nvSpPr>
+          <p:cNvPr id="3" name="TextBox 2"/>
+          <p:cNvSpPr txBox="1"/>
+          <p:nvPr/>
+        </p:nvSpPr>
+        <p:spPr>
+          <a:xfrm>
+            <a:off x="548640" y="1234440"/>
+            <a:ext cx="11064240" cy="4937760"/>
+          </a:xfrm>
+          <a:prstGeom prst="rect">
+            <a:avLst/>
+          </a:prstGeom>
+          <a:noFill/>
+        </p:spPr>
+        <p:txBody>
+          <a:bodyPr wrap="square">
+            <a:noAutofit/>
+          </a:bodyPr>
+          <a:lstStyle/>
+          <a:p>
+            <a:pPr>
+              <a:lnSpc>
+                <a:spcPts val="2200"/>
+              </a:lnSpc>
+              <a:spcAft>
+                <a:spcPts val="1000"/>
+              </a:spcAft>
+              <a:defRPr sz="2000" b="0">
+                <a:solidFill>
+                  <a:srgbClr val="333333"/>
+                </a:solidFill>
+                <a:latin typeface="Calibri"/>
+              </a:defRPr>
+            </a:pPr>
+            <a:r>
+              <a:t>• Transaction Class Design</a:t>
+            </a:r>
+          </a:p>
+          <a:p>
+            <a:pPr>
+              <a:lnSpc>
+                <a:spcPts val="2200"/>
+              </a:lnSpc>
+              <a:spcAft>
+                <a:spcPts val="1000"/>
+              </a:spcAft>
+              <a:defRPr sz="2000" b="0">
+                <a:solidFill>
+                  <a:srgbClr val="333333"/>
+                </a:solidFill>
+                <a:latin typeface="Calibri"/>
+              </a:defRPr>
+            </a:pPr>
+            <a:r>
+              <a:t>• Interface Design</a:t>
+            </a:r>
+          </a:p>
+          <a:p>
+            <a:pPr>
+              <a:lnSpc>
+                <a:spcPts val="2200"/>
+              </a:lnSpc>
+              <a:spcAft>
+                <a:spcPts val="1000"/>
+              </a:spcAft>
+              <a:defRPr sz="2000" b="0">
+                <a:solidFill>
+                  <a:srgbClr val="333333"/>
+                </a:solidFill>
+                <a:latin typeface="Calibri"/>
+              </a:defRPr>
+            </a:pPr>
+            <a:r>
+              <a:t>• Package Organization</a:t>
+            </a:r>
+          </a:p>
+          <a:p>
+            <a:pPr>
+              <a:lnSpc>
+                <a:spcPts val="2200"/>
+              </a:lnSpc>
+              <a:spcAft>
+                <a:spcPts val="1000"/>
+              </a:spcAft>
+              <a:defRPr sz="2000" b="0">
+                <a:solidFill>
+                  <a:srgbClr val="333333"/>
+                </a:solidFill>
+                <a:latin typeface="Calibri"/>
+              </a:defRPr>
+            </a:pPr>
+            <a:r>
+              <a:t>• Data Structure Usage</a:t>
+            </a:r>
+          </a:p>
+          <a:p>
+            <a:pPr>
+              <a:lnSpc>
+                <a:spcPts val="2200"/>
+              </a:lnSpc>
+              <a:spcAft>
+                <a:spcPts val="1000"/>
+              </a:spcAft>
+              <a:defRPr sz="2000" b="0">
+                <a:solidFill>
+                  <a:srgbClr val="333333"/>
+                </a:solidFill>
+                <a:latin typeface="Calibri"/>
+              </a:defRPr>
+            </a:pPr>
+            <a:r>
+              <a:t>• Error Handling</a:t>
+            </a:r>
+          </a:p>
+        </p:txBody>
+      </p:sp>
+      <p:sp>
+        <p:nvSpPr>
+          <p:cNvPr id="4" name="TextBox 3"/>
+          <p:cNvSpPr txBox="1"/>
+          <p:nvPr/>
+        </p:nvSpPr>
+        <p:spPr>
+          <a:xfrm>
+            <a:off x="548640" y="6355080"/>
+            <a:ext cx="11064240" cy="320040"/>
+          </a:xfrm>
+          <a:prstGeom prst="rect">
+            <a:avLst/>
+          </a:prstGeom>
+          <a:noFill/>
+        </p:spPr>
+        <p:txBody>
+          <a:bodyPr wrap="square">
+            <a:noAutofit/>
+          </a:bodyPr>
+          <a:lstStyle/>
+          <a:p>
+            <a:pPr algn="r">
+              <a:lnSpc>
+                <a:spcPts val="2200"/>
+              </a:lnSpc>
+              <a:defRPr sz="1000" b="0">
+                <a:solidFill>
+                  <a:srgbClr val="666666"/>
+                </a:solidFill>
+                <a:latin typeface="Calibri"/>
+              </a:defRPr>
+            </a:pPr>
+            <a:r>
+              <a:t>learn_uvm2017_sv_verilator / Module 1</a:t>
+            </a:r>
+          </a:p>
+        </p:txBody>
+      </p:sp>
+    </p:spTree>
+  </p:cSld>
+  <p:clrMapOvr>
+    <a:masterClrMapping/>
+  </p:clrMapOvr>
+</p:sld>
+</file>
+
+<file path=ppt/slides/slide64.xml><?xml version="1.0" encoding="utf-8"?>
+<p:sld xmlns:a="http://schemas.openxmlformats.org/drawingml/2006/main" xmlns:p="http://schemas.openxmlformats.org/presentationml/2006/main" xmlns:r="http://schemas.openxmlformats.org/officeDocument/2006/relationships">
+  <p:cSld>
+    <p:spTree>
+      <p:nvGrpSpPr>
+        <p:cNvPr id="1" name=""/>
+        <p:cNvGrpSpPr/>
+        <p:nvPr/>
+      </p:nvGrpSpPr>
+      <p:grpSpPr/>
+      <p:sp>
+        <p:nvSpPr>
+          <p:cNvPr id="2" name="TextBox 1"/>
+          <p:cNvSpPr txBox="1"/>
+          <p:nvPr/>
+        </p:nvSpPr>
+        <p:spPr>
+          <a:xfrm>
+            <a:off x="548640" y="411480"/>
+            <a:ext cx="11064240" cy="777240"/>
+          </a:xfrm>
+          <a:prstGeom prst="rect">
+            <a:avLst/>
+          </a:prstGeom>
+          <a:noFill/>
+        </p:spPr>
+        <p:txBody>
+          <a:bodyPr wrap="square">
+            <a:noAutofit/>
+          </a:bodyPr>
+          <a:lstStyle/>
+          <a:p>
+            <a:pPr>
+              <a:lnSpc>
+                <a:spcPts val="2200"/>
+              </a:lnSpc>
+              <a:defRPr sz="2800" b="1">
+                <a:solidFill>
+                  <a:srgbClr val="1A1A2E"/>
+                </a:solidFill>
+                <a:latin typeface="Calibri"/>
+              </a:defRPr>
+            </a:pPr>
+            <a:r>
+              <a:t>Assessment checklist</a:t>
+            </a:r>
+          </a:p>
+        </p:txBody>
+      </p:sp>
+      <p:sp>
+        <p:nvSpPr>
+          <p:cNvPr id="3" name="TextBox 2"/>
+          <p:cNvSpPr txBox="1"/>
+          <p:nvPr/>
+        </p:nvSpPr>
+        <p:spPr>
+          <a:xfrm>
+            <a:off x="548640" y="1234440"/>
+            <a:ext cx="11064240" cy="4937760"/>
+          </a:xfrm>
+          <a:prstGeom prst="rect">
+            <a:avLst/>
+          </a:prstGeom>
+          <a:noFill/>
+        </p:spPr>
+        <p:txBody>
+          <a:bodyPr wrap="square">
+            <a:noAutofit/>
+          </a:bodyPr>
+          <a:lstStyle/>
+          <a:p>
+            <a:pPr>
+              <a:lnSpc>
+                <a:spcPts val="2200"/>
+              </a:lnSpc>
+              <a:spcAft>
+                <a:spcPts val="1000"/>
+              </a:spcAft>
+              <a:defRPr sz="2000" b="0">
+                <a:solidFill>
+                  <a:srgbClr val="333333"/>
+                </a:solidFill>
+                <a:latin typeface="Calibri"/>
+              </a:defRPr>
+            </a:pPr>
+            <a:r>
+              <a:t>• Can create SystemVerilog classes with inheritance</a:t>
+            </a:r>
+          </a:p>
+          <a:p>
+            <a:pPr>
+              <a:lnSpc>
+                <a:spcPts val="2200"/>
+              </a:lnSpc>
+              <a:spcAft>
+                <a:spcPts val="1000"/>
+              </a:spcAft>
+              <a:defRPr sz="2000" b="0">
+                <a:solidFill>
+                  <a:srgbClr val="333333"/>
+                </a:solidFill>
+                <a:latin typeface="Calibri"/>
+              </a:defRPr>
+            </a:pPr>
+            <a:r>
+              <a:t>• Can design and use interfaces with modports</a:t>
+            </a:r>
+          </a:p>
+          <a:p>
+            <a:pPr>
+              <a:lnSpc>
+                <a:spcPts val="2200"/>
+              </a:lnSpc>
+              <a:spcAft>
+                <a:spcPts val="1000"/>
+              </a:spcAft>
+              <a:defRPr sz="2000" b="0">
+                <a:solidFill>
+                  <a:srgbClr val="333333"/>
+                </a:solidFill>
+                <a:latin typeface="Calibri"/>
+              </a:defRPr>
+            </a:pPr>
+            <a:r>
+              <a:t>• Can organize code using packages</a:t>
+            </a:r>
+          </a:p>
+          <a:p>
+            <a:pPr>
+              <a:lnSpc>
+                <a:spcPts val="2200"/>
+              </a:lnSpc>
+              <a:spcAft>
+                <a:spcPts val="1000"/>
+              </a:spcAft>
+              <a:defRPr sz="2000" b="0">
+                <a:solidFill>
+                  <a:srgbClr val="333333"/>
+                </a:solidFill>
+                <a:latin typeface="Calibri"/>
+              </a:defRPr>
+            </a:pPr>
+            <a:r>
+              <a:t>• Can use appropriate data structures</a:t>
+            </a:r>
+          </a:p>
+          <a:p>
+            <a:pPr>
+              <a:lnSpc>
+                <a:spcPts val="2200"/>
+              </a:lnSpc>
+              <a:spcAft>
+                <a:spcPts val="1000"/>
+              </a:spcAft>
+              <a:defRPr sz="2000" b="0">
+                <a:solidFill>
+                  <a:srgbClr val="333333"/>
+                </a:solidFill>
+                <a:latin typeface="Calibri"/>
+              </a:defRPr>
+            </a:pPr>
+            <a:r>
+              <a:t>• Can implement error handling and logging</a:t>
+            </a:r>
+          </a:p>
+          <a:p>
+            <a:pPr>
+              <a:lnSpc>
+                <a:spcPts val="2200"/>
+              </a:lnSpc>
+              <a:spcAft>
+                <a:spcPts val="1000"/>
+              </a:spcAft>
+              <a:defRPr sz="2000" b="0">
+                <a:solidFill>
+                  <a:srgbClr val="333333"/>
+                </a:solidFill>
+                <a:latin typeface="Calibri"/>
+              </a:defRPr>
+            </a:pPr>
+            <a:r>
+              <a:t>• Can write basic SystemVerilog testbenches</a:t>
+            </a:r>
+          </a:p>
+        </p:txBody>
+      </p:sp>
+      <p:sp>
+        <p:nvSpPr>
+          <p:cNvPr id="4" name="TextBox 3"/>
+          <p:cNvSpPr txBox="1"/>
+          <p:nvPr/>
+        </p:nvSpPr>
+        <p:spPr>
+          <a:xfrm>
+            <a:off x="548640" y="6355080"/>
+            <a:ext cx="11064240" cy="320040"/>
+          </a:xfrm>
+          <a:prstGeom prst="rect">
+            <a:avLst/>
+          </a:prstGeom>
+          <a:noFill/>
+        </p:spPr>
+        <p:txBody>
+          <a:bodyPr wrap="square">
+            <a:noAutofit/>
+          </a:bodyPr>
+          <a:lstStyle/>
+          <a:p>
+            <a:pPr algn="r">
+              <a:lnSpc>
+                <a:spcPts val="2200"/>
+              </a:lnSpc>
+              <a:defRPr sz="1000" b="0">
+                <a:solidFill>
+                  <a:srgbClr val="666666"/>
+                </a:solidFill>
+                <a:latin typeface="Calibri"/>
+              </a:defRPr>
+            </a:pPr>
+            <a:r>
+              <a:t>learn_uvm2017_sv_verilator / Module 1</a:t>
+            </a:r>
+          </a:p>
+        </p:txBody>
+      </p:sp>
+    </p:spTree>
+  </p:cSld>
+  <p:clrMapOvr>
+    <a:masterClrMapping/>
+  </p:clrMapOvr>
+</p:sld>
+</file>
+
+<file path=ppt/slides/slide65.xml><?xml version="1.0" encoding="utf-8"?>
+<p:sld xmlns:a="http://schemas.openxmlformats.org/drawingml/2006/main" xmlns:p="http://schemas.openxmlformats.org/presentationml/2006/main" xmlns:r="http://schemas.openxmlformats.org/officeDocument/2006/relationships">
+  <p:cSld>
+    <p:spTree>
+      <p:nvGrpSpPr>
+        <p:cNvPr id="1" name=""/>
+        <p:cNvGrpSpPr/>
+        <p:nvPr/>
+      </p:nvGrpSpPr>
+      <p:grpSpPr/>
+      <p:sp>
+        <p:nvSpPr>
+          <p:cNvPr id="2" name="TextBox 1"/>
+          <p:cNvSpPr txBox="1"/>
+          <p:nvPr/>
+        </p:nvSpPr>
+        <p:spPr>
+          <a:xfrm>
+            <a:off x="548640" y="411480"/>
+            <a:ext cx="11064240" cy="777240"/>
+          </a:xfrm>
+          <a:prstGeom prst="rect">
+            <a:avLst/>
+          </a:prstGeom>
+          <a:noFill/>
+        </p:spPr>
+        <p:txBody>
+          <a:bodyPr wrap="square">
+            <a:noAutofit/>
+          </a:bodyPr>
+          <a:lstStyle/>
+          <a:p>
+            <a:pPr>
+              <a:lnSpc>
+                <a:spcPts val="2200"/>
+              </a:lnSpc>
+              <a:defRPr sz="2800" b="1">
+                <a:solidFill>
+                  <a:srgbClr val="1A1A2E"/>
+                </a:solidFill>
+                <a:latin typeface="Calibri"/>
+              </a:defRPr>
+            </a:pPr>
+            <a:r>
+              <a:t>Summary &amp; next steps</a:t>
+            </a:r>
+          </a:p>
+        </p:txBody>
+      </p:sp>
+      <p:sp>
+        <p:nvSpPr>
+          <p:cNvPr id="3" name="TextBox 2"/>
+          <p:cNvSpPr txBox="1"/>
+          <p:nvPr/>
+        </p:nvSpPr>
+        <p:spPr>
+          <a:xfrm>
+            <a:off x="548640" y="1234440"/>
+            <a:ext cx="11064240" cy="4937760"/>
+          </a:xfrm>
+          <a:prstGeom prst="rect">
+            <a:avLst/>
+          </a:prstGeom>
+          <a:noFill/>
+        </p:spPr>
+        <p:txBody>
+          <a:bodyPr wrap="square">
+            <a:noAutofit/>
+          </a:bodyPr>
+          <a:lstStyle/>
+          <a:p>
+            <a:pPr>
+              <a:lnSpc>
+                <a:spcPts val="2200"/>
+              </a:lnSpc>
+              <a:spcAft>
+                <a:spcPts val="1000"/>
+              </a:spcAft>
+              <a:defRPr sz="2000" b="0">
+                <a:solidFill>
+                  <a:srgbClr val="333333"/>
+                </a:solidFill>
+                <a:latin typeface="Calibri"/>
+              </a:defRPr>
+            </a:pPr>
+            <a:r>
+              <a:t>• Understand SystemVerilog for verification and</a:t>
+            </a:r>
+          </a:p>
+          <a:p>
+            <a:pPr>
+              <a:lnSpc>
+                <a:spcPts val="2200"/>
+              </a:lnSpc>
+              <a:spcAft>
+                <a:spcPts val="1000"/>
+              </a:spcAft>
+              <a:defRPr sz="2000" b="0">
+                <a:solidFill>
+                  <a:srgbClr val="333333"/>
+                </a:solidFill>
+                <a:latin typeface="Calibri"/>
+              </a:defRPr>
+            </a:pPr>
+            <a:r>
+              <a:t>      verification fundamentals</a:t>
+            </a:r>
+          </a:p>
+          <a:p>
+            <a:pPr>
+              <a:lnSpc>
+                <a:spcPts val="2200"/>
+              </a:lnSpc>
+              <a:spcAft>
+                <a:spcPts val="1000"/>
+              </a:spcAft>
+              <a:defRPr sz="2000" b="0">
+                <a:solidFill>
+                  <a:srgbClr val="333333"/>
+                </a:solidFill>
+                <a:latin typeface="Calibri"/>
+              </a:defRPr>
+            </a:pPr>
+            <a:r>
+              <a:t>• Complete module1/CHECKLIST.md</a:t>
+            </a:r>
+          </a:p>
+          <a:p>
+            <a:pPr>
+              <a:lnSpc>
+                <a:spcPts val="2200"/>
+              </a:lnSpc>
+              <a:spcAft>
+                <a:spcPts val="1000"/>
+              </a:spcAft>
+              <a:defRPr sz="2000" b="0">
+                <a:solidFill>
+                  <a:srgbClr val="333333"/>
+                </a:solidFill>
+                <a:latin typeface="Calibri"/>
+              </a:defRPr>
+            </a:pPr>
+            <a:r>
+              <a:t>• Review module1/EXAMPLES.md and run each lab</a:t>
+            </a:r>
+          </a:p>
+          <a:p>
+            <a:pPr>
+              <a:lnSpc>
+                <a:spcPts val="2200"/>
+              </a:lnSpc>
+              <a:spcAft>
+                <a:spcPts val="1000"/>
+              </a:spcAft>
+              <a:defRPr sz="2000" b="0">
+                <a:solidFill>
+                  <a:srgbClr val="333333"/>
+                </a:solidFill>
+                <a:latin typeface="Calibri"/>
+              </a:defRPr>
+            </a:pPr>
+            <a:r>
+              <a:t>• Next: Next module in course</a:t>
+            </a:r>
+          </a:p>
+        </p:txBody>
+      </p:sp>
+      <p:sp>
+        <p:nvSpPr>
+          <p:cNvPr id="4" name="TextBox 3"/>
           <p:cNvSpPr txBox="1"/>
           <p:nvPr/>
         </p:nvSpPr>
